--- a/docs/Thorium.pptx
+++ b/docs/Thorium.pptx
@@ -50849,7 +50849,7 @@
             </a:pPr>
             <a:r>
               <a:rPr lang="en-GB" dirty="0"/>
-              <a:t>Fifteen mistakes that now fail the build</a:t>
+              <a:t>Fourteen mistakes that now fail the build</a:t>
             </a:r>
           </a:p>
         </p:txBody>
@@ -50973,13 +50973,6 @@
             <a:r>
               <a:rPr lang="en-GB" dirty="0"/>
               <a:t>A misspelled test point</a:t>
-            </a:r>
-          </a:p>
-          <a:p>
-            <a:pPr/>
-            <a:r>
-              <a:rPr lang="en-GB" dirty="0"/>
-              <a:t>Current measured on a voltage point</a:t>
             </a:r>
           </a:p>
           <a:p>

--- a/docs/Thorium.pptx
+++ b/docs/Thorium.pptx
@@ -50849,7 +50849,7 @@
             </a:pPr>
             <a:r>
               <a:rPr lang="en-GB" dirty="0"/>
-              <a:t>Fourteen mistakes that now fail the build</a:t>
+              <a:t>Fifteen mistakes that now fail the build</a:t>
             </a:r>
           </a:p>
         </p:txBody>
@@ -51052,6 +51052,13 @@
             <a:r>
               <a:rPr lang="en-GB" dirty="0"/>
               <a:t>A half-declared unit</a:t>
+            </a:r>
+          </a:p>
+          <a:p>
+            <a:pPr/>
+            <a:r>
+              <a:rPr lang="en-GB" dirty="0"/>
+              <a:t>Sense leads wired without force leads</a:t>
             </a:r>
           </a:p>
           <a:p>

--- a/docs/Thorium.pptx
+++ b/docs/Thorium.pptx
@@ -29,6 +29,13 @@
     <p:sldId id="616" r:id="rSlide16"/>
     <p:sldId id="617" r:id="rSlide17"/>
     <p:sldId id="618" r:id="rSlide18"/>
+    <p:sldId id="619" r:id="rSlide19"/>
+    <p:sldId id="620" r:id="rSlide20"/>
+    <p:sldId id="621" r:id="rSlide21"/>
+    <p:sldId id="622" r:id="rSlide22"/>
+    <p:sldId id="623" r:id="rSlide23"/>
+    <p:sldId id="624" r:id="rSlide24"/>
+    <p:sldId id="625" r:id="rSlide25"/>
   </p:sldIdLst>
   <p:sldSz cx="11520488" cy="6480175"/>
   <p:notesSz cx="6858000" cy="9144000"/>
@@ -48335,7 +48342,7 @@
             </a:pPr>
             <a:r>
               <a:rPr lang="en-GB" dirty="0"/>
-              <a:t>Hardware test automation that fails at compile time</a:t>
+              <a:t>Writing hardware tests that cannot lie to you</a:t>
             </a:r>
           </a:p>
           <a:p>
@@ -48419,7 +48426,7 @@
             </a:pPr>
             <a:r>
               <a:rPr lang="en-GB" dirty="0"/>
-              <a:t>The payoff</a:t>
+              <a:t>Working</a:t>
             </a:r>
           </a:p>
         </p:txBody>
@@ -48444,7 +48451,7 @@
             </a:pPr>
             <a:r>
               <a:rPr lang="en-GB" dirty="0"/>
-              <a:t>Two checks worth a closer look</a:t>
+              <a:t>You do not need the rig to write the test</a:t>
             </a:r>
           </a:p>
         </p:txBody>
@@ -48464,41 +48471,65 @@
           <a:bodyPr/>
           <a:lstStyle/>
           <a:p>
-            <a:pPr marL="0" indent="0">
-              <a:buNone/>
-            </a:pPr>
+            <a:pPr/>
             <a:r>
               <a:rPr lang="en-GB" dirty="0">
                 <a:solidFill>
                   <a:srgbClr val="9795FF"/>
                 </a:solidFill>
               </a:rPr>
-              <a:t>Wiring coverage. </a:t>
+              <a:t>Inject. </a:t>
             </a:r>
             <a:r>
               <a:rPr lang="en-GB" dirty="0"/>
-              <a:t>One test file has no assertions at all — the point is that it compiles. It walks every declared test point and demands a matching wiring entry. Forget one and the build stops.</a:t>
+              <a:t>Feed a script the readings you want and check it reaches the verdict you expect.</a:t>
             </a:r>
           </a:p>
           <a:p>
             <a:pPr/>
-            <a:endParaRPr lang="en-GB"/>
-          </a:p>
-          <a:p>
-            <a:pPr marL="0" indent="0">
-              <a:buNone/>
-            </a:pPr>
             <a:r>
               <a:rPr lang="en-GB" dirty="0">
                 <a:solidFill>
                   <a:srgbClr val="9795FF"/>
                 </a:solidFill>
               </a:rPr>
-              <a:t>Tolerance variants. </a:t>
+              <a:t>Record. </a:t>
             </a:r>
             <a:r>
               <a:rPr lang="en-GB" dirty="0"/>
-              <a:t>Production, stress-chamber and aged-equipment limits are three tables. A value unchanged from production is written once and referenced — so it cannot drift, and a typo in the reference will not compile.</a:t>
+              <a:t>Capture every reading a real run took, in order.</a:t>
+            </a:r>
+          </a:p>
+          <a:p>
+            <a:pPr/>
+            <a:r>
+              <a:rPr lang="en-GB" dirty="0">
+                <a:solidFill>
+                  <a:srgbClr val="9795FF"/>
+                </a:solidFill>
+              </a:rPr>
+              <a:t>Replay. </a:t>
+            </a:r>
+            <a:r>
+              <a:rPr lang="en-GB" dirty="0"/>
+              <a:t>Re-run the suite against that file — same verdict, no hardware, no bench time.</a:t>
+            </a:r>
+          </a:p>
+          <a:p>
+            <a:pPr/>
+            <a:endParaRPr lang="en-GB"/>
+          </a:p>
+          <a:p>
+            <a:pPr marL="0" indent="0">
+              <a:buNone/>
+            </a:pPr>
+            <a:r>
+              <a:rPr lang="en-GB" dirty="0">
+                <a:solidFill>
+                  <a:srgbClr val="9795FF"/>
+                </a:solidFill>
+              </a:rPr>
+              <a:t>A failure seen once on the bench becomes a test anyone can re-run at a desk.</a:t>
             </a:r>
           </a:p>
         </p:txBody>
@@ -48560,7 +48591,7 @@
             <a:spLocks noGrp="1"/>
           </p:cNvSpPr>
           <p:nvPr>
-            <p:ph type="body" sz="quarter" idx="15"/>
+            <p:ph type="body" sz="quarter" idx="13"/>
           </p:nvPr>
         </p:nvSpPr>
         <p:spPr/>
@@ -48573,7 +48604,7 @@
             </a:pPr>
             <a:r>
               <a:rPr lang="en-GB" dirty="0"/>
-              <a:t>Evidence</a:t>
+              <a:t>Working</a:t>
             </a:r>
           </a:p>
         </p:txBody>
@@ -48598,19 +48629,92 @@
             </a:pPr>
             <a:r>
               <a:rPr lang="en-GB" dirty="0"/>
-              <a:t>Every run explains itself, twice</a:t>
+              <a:t>One suite, three sets of limits</a:t>
             </a:r>
           </a:p>
         </p:txBody>
       </p:sp>
       <p:sp>
         <p:nvSpPr>
-          <p:cNvPr id="4" name="Footer 4"/>
+          <p:cNvPr id="4" name="Body 4"/>
           <p:cNvSpPr>
             <a:spLocks noGrp="1"/>
           </p:cNvSpPr>
           <p:nvPr>
-            <p:ph type="ftr" sz="quarter" idx="17"/>
+            <p:ph sz="half" idx="2"/>
+          </p:nvPr>
+        </p:nvSpPr>
+        <p:spPr/>
+        <p:txBody>
+          <a:bodyPr/>
+          <a:lstStyle/>
+          <a:p>
+            <a:pPr/>
+            <a:r>
+              <a:rPr lang="en-GB" dirty="0"/>
+              <a:t>Production, stress-chamber and aged-equipment tolerances are three tables</a:t>
+            </a:r>
+          </a:p>
+          <a:p>
+            <a:pPr/>
+            <a:r>
+              <a:rPr lang="en-GB" dirty="0"/>
+              <a:t>A limit unchanged from production is written once and referenced — it cannot drift</a:t>
+            </a:r>
+          </a:p>
+          <a:p>
+            <a:pPr/>
+            <a:r>
+              <a:rPr lang="en-GB" dirty="0"/>
+              <a:t>All three are compiled in; the operator picks per run</a:t>
+            </a:r>
+          </a:p>
+          <a:p>
+            <a:pPr/>
+            <a:endParaRPr lang="en-GB"/>
+          </a:p>
+          <a:p>
+            <a:pPr marL="0" indent="0">
+              <a:buNone/>
+            </a:pPr>
+            <a:r>
+              <a:rPr lang="en-GB" dirty="0" sz="1200">
+                <a:solidFill>
+                  <a:srgbClr val="9795FF"/>
+                </a:solidFill>
+                <a:latin typeface="Menlo"/>
+                <a:cs typeface="Menlo"/>
+              </a:rPr>
+              <a:t>run_scripts --criteria=stress</a:t>
+            </a:r>
+          </a:p>
+          <a:p>
+            <a:pPr/>
+            <a:endParaRPr lang="en-GB"/>
+          </a:p>
+          <a:p>
+            <a:pPr marL="0" indent="0">
+              <a:buNone/>
+            </a:pPr>
+            <a:r>
+              <a:rPr lang="en-GB" dirty="0">
+                <a:solidFill>
+                  <a:srgbClr val="9795FF"/>
+                </a:solidFill>
+              </a:rPr>
+              <a:t>An unknown name is fatal and lists the ones that would have worked.</a:t>
+            </a:r>
+          </a:p>
+        </p:txBody>
+      </p:sp>
+      <p:sp>
+        <p:nvSpPr>
+          <p:cNvPr id="5" name="Footer 5"/>
+          <p:cNvSpPr>
+            <a:spLocks noGrp="1"/>
+          </p:cNvSpPr>
+          <p:nvPr>
+            <p:ph type="ftr" sz="quarter" idx="15"/>
           </p:nvPr>
         </p:nvSpPr>
         <p:spPr/>
@@ -48673,7 +48777,7 @@
             </a:pPr>
             <a:r>
               <a:rPr lang="en-GB" dirty="0"/>
-              <a:t>Evidence</a:t>
+              <a:t>Working</a:t>
             </a:r>
           </a:p>
         </p:txBody>
@@ -48698,7 +48802,7 @@
             </a:pPr>
             <a:r>
               <a:rPr lang="en-GB" dirty="0"/>
-              <a:t>One event stream, two audiences</a:t>
+              <a:t>Running what you just wrote</a:t>
             </a:r>
           </a:p>
         </p:txBody>
@@ -48727,7 +48831,7 @@
                   <a:srgbClr val="9795FF"/>
                 </a:solidFill>
               </a:rPr>
-              <a:t>For people</a:t>
+              <a:t>Pick from a menu</a:t>
             </a:r>
           </a:p>
           <a:p>
@@ -48735,38 +48839,36 @@
             <a:endParaRPr lang="en-GB"/>
           </a:p>
           <a:p>
+            <a:pPr marL="0" indent="0">
+              <a:buNone/>
+            </a:pPr>
+            <a:r>
+              <a:rPr lang="en-GB" dirty="0" sz="1200">
+                <a:solidFill>
+                  <a:srgbClr val="9795FF"/>
+                </a:solidFill>
+                <a:latin typeface="Menlo"/>
+                <a:cs typeface="Menlo"/>
+              </a:rPr>
+              <a:t>tools/run-tests.sh</a:t>
+            </a:r>
+          </a:p>
+          <a:p>
             <a:pPr/>
+            <a:endParaRPr lang="en-GB"/>
+          </a:p>
+          <a:p>
+            <a:pPr/>
             <a:r>
               <a:rPr lang="en-GB" dirty="0"/>
-              <a:t>Colour-coded RTF, opens in Word</a:t>
+              <a:t>Group, then one, several or all of its tests</a:t>
             </a:r>
           </a:p>
           <a:p>
             <a:pPr/>
             <a:r>
               <a:rPr lang="en-GB" dirty="0"/>
-              <a:t>Grouped the way the catalog is</a:t>
-            </a:r>
-          </a:p>
-          <a:p>
-            <a:pPr/>
-            <a:r>
-              <a:rPr lang="en-GB" dirty="0"/>
-              <a:t>Each check states what was measured and what was required</a:t>
-            </a:r>
-          </a:p>
-          <a:p>
-            <a:pPr/>
-            <a:r>
-              <a:rPr lang="en-GB" dirty="0"/>
-              <a:t>Readable while the run is going</a:t>
-            </a:r>
-          </a:p>
-          <a:p>
-            <a:pPr/>
-            <a:r>
-              <a:rPr lang="en-GB" dirty="0"/>
-              <a:t>Live on the console too</a:t>
+              <a:t>The catalog only — never build artefacts</a:t>
             </a:r>
           </a:p>
         </p:txBody>
@@ -48795,7 +48897,7 @@
                   <a:srgbClr val="9795FF"/>
                 </a:solidFill>
               </a:rPr>
-              <a:t>For tools</a:t>
+              <a:t>Or say exactly what you want</a:t>
             </a:r>
           </a:p>
           <a:p>
@@ -48806,28 +48908,45 @@
             <a:pPr/>
             <a:r>
               <a:rPr lang="en-GB" dirty="0"/>
-              <a:t>SARIF 2.1.0 — an industry format</a:t>
+              <a:t>--select=A,B  ·  --repeat=50</a:t>
             </a:r>
           </a:p>
           <a:p>
             <a:pPr/>
             <a:r>
               <a:rPr lang="en-GB" dirty="0"/>
-              <a:t>Every step, routing and safing</a:t>
+              <a:t>--until-failure  ·  --list-tests</a:t>
             </a:r>
           </a:p>
           <a:p>
             <a:pPr/>
             <a:r>
               <a:rPr lang="en-GB" dirty="0"/>
-              <a:t>Each requirement becomes a queryable rule</a:t>
+              <a:t>--record=  ·  --replay=</a:t>
             </a:r>
           </a:p>
           <a:p>
             <a:pPr/>
             <a:r>
               <a:rPr lang="en-GB" dirty="0"/>
-              <a:t>Ingested by CI, no custom parser</a:t>
+              <a:t>--safe drops the rig to idle and exits</a:t>
+            </a:r>
+          </a:p>
+          <a:p>
+            <a:pPr/>
+            <a:endParaRPr lang="en-GB"/>
+          </a:p>
+          <a:p>
+            <a:pPr marL="0" indent="0">
+              <a:buNone/>
+            </a:pPr>
+            <a:r>
+              <a:rPr lang="en-GB" dirty="0">
+                <a:solidFill>
+                  <a:srgbClr val="9795FF"/>
+                </a:solidFill>
+              </a:rPr>
+              <a:t>Exit code is 0 only if every selected test passed.</a:t>
             </a:r>
           </a:p>
         </p:txBody>
@@ -48927,14 +49046,75 @@
             </a:pPr>
             <a:r>
               <a:rPr lang="en-GB" dirty="0"/>
-              <a:t>Both logs answer: which run?</a:t>
+              <a:t>One event stream, two audiences</a:t>
             </a:r>
           </a:p>
         </p:txBody>
       </p:sp>
       <p:sp>
         <p:nvSpPr>
-          <p:cNvPr id="4" name="Body 4"/>
+          <p:cNvPr id="4" name="Left 4"/>
+          <p:cNvSpPr>
+            <a:spLocks noGrp="1"/>
+          </p:cNvSpPr>
+          <p:nvPr>
+            <p:ph sz="half" idx="1"/>
+          </p:nvPr>
+        </p:nvSpPr>
+        <p:spPr/>
+        <p:txBody>
+          <a:bodyPr/>
+          <a:lstStyle/>
+          <a:p>
+            <a:pPr marL="0" indent="0">
+              <a:buNone/>
+            </a:pPr>
+            <a:r>
+              <a:rPr lang="en-GB" dirty="0">
+                <a:solidFill>
+                  <a:srgbClr val="9795FF"/>
+                </a:solidFill>
+              </a:rPr>
+              <a:t>For people</a:t>
+            </a:r>
+          </a:p>
+          <a:p>
+            <a:pPr/>
+            <a:endParaRPr lang="en-GB"/>
+          </a:p>
+          <a:p>
+            <a:pPr/>
+            <a:r>
+              <a:rPr lang="en-GB" dirty="0"/>
+              <a:t>Colour-coded RTF, opens in Word</a:t>
+            </a:r>
+          </a:p>
+          <a:p>
+            <a:pPr/>
+            <a:r>
+              <a:rPr lang="en-GB" dirty="0"/>
+              <a:t>Grouped the way your catalog is</a:t>
+            </a:r>
+          </a:p>
+          <a:p>
+            <a:pPr/>
+            <a:r>
+              <a:rPr lang="en-GB" dirty="0"/>
+              <a:t>Each check states what was measured and what was required</a:t>
+            </a:r>
+          </a:p>
+          <a:p>
+            <a:pPr/>
+            <a:r>
+              <a:rPr lang="en-GB" dirty="0"/>
+              <a:t>Readable while the run is still going</a:t>
+            </a:r>
+          </a:p>
+        </p:txBody>
+      </p:sp>
+      <p:sp>
+        <p:nvSpPr>
+          <p:cNvPr id="5" name="Right 5"/>
           <p:cNvSpPr>
             <a:spLocks noGrp="1"/>
           </p:cNvSpPr>
@@ -48947,31 +49127,6 @@
           <a:bodyPr/>
           <a:lstStyle/>
           <a:p>
-            <a:pPr/>
-            <a:r>
-              <a:rPr lang="en-GB" dirty="0"/>
-              <a:t>Device and serial number  ·  operator  ·  tolerance table</a:t>
-            </a:r>
-          </a:p>
-          <a:p>
-            <a:pPr/>
-            <a:r>
-              <a:rPr lang="en-GB" dirty="0"/>
-              <a:t>Framework version  ·  revision of the scripts, device and rig data</a:t>
-            </a:r>
-          </a:p>
-          <a:p>
-            <a:pPr/>
-            <a:r>
-              <a:rPr lang="en-GB" dirty="0"/>
-              <a:t>The command line  ·  local time for a person, UTC for a machine</a:t>
-            </a:r>
-          </a:p>
-          <a:p>
-            <a:pPr/>
-            <a:endParaRPr lang="en-GB"/>
-          </a:p>
-          <a:p>
             <a:pPr marL="0" indent="0">
               <a:buNone/>
             </a:pPr>
@@ -48981,14 +49136,46 @@
                   <a:srgbClr val="9795FF"/>
                 </a:solidFill>
               </a:rPr>
-              <a:t>Stamped in by the build, not typed in by a caller — so a report cannot claim the wrong device or the wrong limits.</a:t>
+              <a:t>For tools</a:t>
+            </a:r>
+          </a:p>
+          <a:p>
+            <a:pPr/>
+            <a:endParaRPr lang="en-GB"/>
+          </a:p>
+          <a:p>
+            <a:pPr/>
+            <a:r>
+              <a:rPr lang="en-GB" dirty="0"/>
+              <a:t>SARIF 2.1.0 — an industry format</a:t>
+            </a:r>
+          </a:p>
+          <a:p>
+            <a:pPr/>
+            <a:r>
+              <a:rPr lang="en-GB" dirty="0"/>
+              <a:t>Every step, including routing and safing</a:t>
+            </a:r>
+          </a:p>
+          <a:p>
+            <a:pPr/>
+            <a:r>
+              <a:rPr lang="en-GB" dirty="0"/>
+              <a:t>Each requirement becomes a queryable rule</a:t>
+            </a:r>
+          </a:p>
+          <a:p>
+            <a:pPr/>
+            <a:r>
+              <a:rPr lang="en-GB" dirty="0"/>
+              <a:t>Ingested by CI with no custom parser</a:t>
             </a:r>
           </a:p>
         </p:txBody>
       </p:sp>
       <p:sp>
         <p:nvSpPr>
-          <p:cNvPr id="5" name="Footer 5"/>
+          <p:cNvPr id="6" name="Footer 6"/>
           <p:cNvSpPr>
             <a:spLocks noGrp="1"/>
           </p:cNvSpPr>
@@ -49081,7 +49268,7 @@
             </a:pPr>
             <a:r>
               <a:rPr lang="en-GB" dirty="0"/>
-              <a:t>278 tests, and none of them need a rig</a:t>
+              <a:t>Both logs answer: which run was this?</a:t>
             </a:r>
           </a:p>
         </p:txBody>
@@ -49104,21 +49291,21 @@
             <a:pPr/>
             <a:r>
               <a:rPr lang="en-GB" dirty="0"/>
-              <a:t>Test scripts run with readings injected, or replayed from a real run</a:t>
+              <a:t>Device and serial number  ·  operator  ·  which tolerance table</a:t>
             </a:r>
           </a:p>
           <a:p>
             <a:pPr/>
             <a:r>
               <a:rPr lang="en-GB" dirty="0"/>
-              <a:t>Two test targets exist only to fail the build on inconsistent data</a:t>
+              <a:t>Framework version  ·  revision of the scripts, device and rig data</a:t>
             </a:r>
           </a:p>
           <a:p>
             <a:pPr/>
             <a:r>
               <a:rPr lang="en-GB" dirty="0"/>
-              <a:t>Seventeen acceptance tests drive the real binary as a subprocess and keep every log they produce</a:t>
+              <a:t>The command line  ·  local time for a person, UTC for a machine</a:t>
             </a:r>
           </a:p>
           <a:p>
@@ -49135,7 +49322,7 @@
                   <a:srgbClr val="9795FF"/>
                 </a:solidFill>
               </a:rPr>
-              <a:t>A developer can change the framework and know within seconds whether a bench would still behave.</a:t>
+              <a:t>Stamped in by the build, not typed in by a caller — so a report cannot claim the wrong device or the wrong limits.</a:t>
             </a:r>
           </a:p>
         </p:txBody>
@@ -49210,7 +49397,7 @@
             </a:pPr>
             <a:r>
               <a:rPr lang="en-GB" dirty="0"/>
-              <a:t>Honestly</a:t>
+              <a:t>Act 2</a:t>
             </a:r>
           </a:p>
         </p:txBody>
@@ -49235,7 +49422,7 @@
             </a:pPr>
             <a:r>
               <a:rPr lang="en-GB" dirty="0"/>
-              <a:t>What this buys, and what it costs</a:t>
+              <a:t>The mechanisms that make that possible</a:t>
             </a:r>
           </a:p>
         </p:txBody>
@@ -49310,7 +49497,7 @@
             </a:pPr>
             <a:r>
               <a:rPr lang="en-GB" dirty="0"/>
-              <a:t>Honestly</a:t>
+              <a:t>Architecture</a:t>
             </a:r>
           </a:p>
         </p:txBody>
@@ -49335,89 +49522,14 @@
             </a:pPr>
             <a:r>
               <a:rPr lang="en-GB" dirty="0"/>
-              <a:t>Pros and cons</a:t>
+              <a:t>Framework, drivers, and one bench's data</a:t>
             </a:r>
           </a:p>
         </p:txBody>
       </p:sp>
       <p:sp>
         <p:nvSpPr>
-          <p:cNvPr id="4" name="Left 4"/>
-          <p:cNvSpPr>
-            <a:spLocks noGrp="1"/>
-          </p:cNvSpPr>
-          <p:nvPr>
-            <p:ph sz="half" idx="1"/>
-          </p:nvPr>
-        </p:nvSpPr>
-        <p:spPr/>
-        <p:txBody>
-          <a:bodyPr/>
-          <a:lstStyle/>
-          <a:p>
-            <a:pPr marL="0" indent="0">
-              <a:buNone/>
-            </a:pPr>
-            <a:r>
-              <a:rPr lang="en-GB" dirty="0">
-                <a:solidFill>
-                  <a:srgbClr val="9795FF"/>
-                </a:solidFill>
-              </a:rPr>
-              <a:t>Strengths</a:t>
-            </a:r>
-          </a:p>
-          <a:p>
-            <a:pPr/>
-            <a:endParaRPr lang="en-GB"/>
-          </a:p>
-          <a:p>
-            <a:pPr/>
-            <a:r>
-              <a:rPr lang="en-GB" dirty="0"/>
-              <a:t>Whole classes of mistake cannot reach the bench</a:t>
-            </a:r>
-          </a:p>
-          <a:p>
-            <a:pPr/>
-            <a:r>
-              <a:rPr lang="en-GB" dirty="0"/>
-              <a:t>Scripts trace straight to the spec</a:t>
-            </a:r>
-          </a:p>
-          <a:p>
-            <a:pPr/>
-            <a:r>
-              <a:rPr lang="en-GB" dirty="0"/>
-              <a:t>Operator view and machine record cannot disagree</a:t>
-            </a:r>
-          </a:p>
-          <a:p>
-            <a:pPr/>
-            <a:r>
-              <a:rPr lang="en-GB" dirty="0"/>
-              <a:t>Scripts testable with no hardware</a:t>
-            </a:r>
-          </a:p>
-          <a:p>
-            <a:pPr/>
-            <a:r>
-              <a:rPr lang="en-GB" dirty="0"/>
-              <a:t>One tolerance value, three tables</a:t>
-            </a:r>
-          </a:p>
-          <a:p>
-            <a:pPr/>
-            <a:r>
-              <a:rPr lang="en-GB" dirty="0"/>
-              <a:t>Reusable across benches</a:t>
-            </a:r>
-          </a:p>
-        </p:txBody>
-      </p:sp>
-      <p:sp>
-        <p:nvSpPr>
-          <p:cNvPr id="5" name="Right 5"/>
+          <p:cNvPr id="4" name="Body 4"/>
           <p:cNvSpPr>
             <a:spLocks noGrp="1"/>
           </p:cNvSpPr>
@@ -49430,16 +49542,48 @@
           <a:bodyPr/>
           <a:lstStyle/>
           <a:p>
-            <a:pPr marL="0" indent="0">
-              <a:buNone/>
-            </a:pPr>
+            <a:pPr/>
             <a:r>
               <a:rPr lang="en-GB" dirty="0">
                 <a:solidFill>
                   <a:srgbClr val="9795FF"/>
                 </a:solidFill>
               </a:rPr>
-              <a:t>Costs and risks</a:t>
+              <a:t>libs/  </a:t>
+            </a:r>
+            <a:r>
+              <a:rPr lang="en-GB" dirty="0"/>
+              <a:t>the portable framework — units, criteria, the verbs, the journal</a:t>
+            </a:r>
+          </a:p>
+          <a:p>
+            <a:pPr/>
+            <a:r>
+              <a:rPr lang="en-GB" dirty="0">
+                <a:solidFill>
+                  <a:srgbClr val="9795FF"/>
+                </a:solidFill>
+              </a:rPr>
+              <a:t>instruments/  </a:t>
+            </a:r>
+            <a:r>
+              <a:rPr lang="en-GB" dirty="0"/>
+              <a:t>one directory per driver, each packageable on its own</a:t>
+            </a:r>
+          </a:p>
+          <a:p>
+            <a:pPr/>
+            <a:r>
+              <a:rPr lang="en-GB" dirty="0">
+                <a:solidFill>
+                  <a:srgbClr val="9795FF"/>
+                </a:solidFill>
+              </a:rPr>
+              <a:t>rig/ dut/ suite/  </a:t>
+            </a:r>
+            <a:r>
+              <a:rPr lang="en-GB" dirty="0"/>
+              <a:t>this bench, this device, these tests — data, not code</a:t>
             </a:r>
           </a:p>
           <a:p>
@@ -49447,52 +49591,32 @@
             <a:endParaRPr lang="en-GB"/>
           </a:p>
           <a:p>
-            <a:pPr/>
+            <a:pPr marL="0" indent="0">
+              <a:buNone/>
+            </a:pPr>
+            <a:r>
+              <a:rPr lang="en-GB" dirty="0">
+                <a:solidFill>
+                  <a:srgbClr val="9795FF"/>
+                </a:solidFill>
+              </a:rPr>
+              <a:t>A second bench testing a second device is its own repository.</a:t>
+            </a:r>
+          </a:p>
+          <a:p>
+            <a:pPr marL="0" indent="0">
+              <a:buNone/>
+            </a:pPr>
             <a:r>
               <a:rPr lang="en-GB" dirty="0"/>
-              <a:t>Experimental C++26; GCC 16 only</a:t>
-            </a:r>
-          </a:p>
-          <a:p>
-            <a:pPr/>
-            <a:r>
-              <a:rPr lang="en-GB" dirty="0"/>
-              <a:t>New scripts need a developer, not a spreadsheet</a:t>
-            </a:r>
-          </a:p>
-          <a:p>
-            <a:pPr/>
-            <a:r>
-              <a:rPr lang="en-GB" dirty="0"/>
-              <a:t>Wiring changes mean a rebuild</a:t>
-            </a:r>
-          </a:p>
-          <a:p>
-            <a:pPr/>
-            <a:r>
-              <a:rPr lang="en-GB" dirty="0"/>
-              <a:t>Few engineers have used reflection</a:t>
-            </a:r>
-          </a:p>
-          <a:p>
-            <a:pPr/>
-            <a:r>
-              <a:rPr lang="en-GB" dirty="0"/>
-              <a:t>Instrument drivers still simulated</a:t>
-            </a:r>
-          </a:p>
-          <a:p>
-            <a:pPr/>
-            <a:r>
-              <a:rPr lang="en-GB" dirty="0"/>
-              <a:t>Template errors can be verbose</a:t>
+              <a:t>It reuses libs/ untouched and brings its own three.</a:t>
             </a:r>
           </a:p>
         </p:txBody>
       </p:sp>
       <p:sp>
         <p:nvSpPr>
-          <p:cNvPr id="6" name="Footer 6"/>
+          <p:cNvPr id="5" name="Footer 5"/>
           <p:cNvSpPr>
             <a:spLocks noGrp="1"/>
           </p:cNvSpPr>
@@ -49560,7 +49684,7 @@
             </a:pPr>
             <a:r>
               <a:rPr lang="en-GB" dirty="0"/>
-              <a:t>Honestly</a:t>
+              <a:t>Mechanism</a:t>
             </a:r>
           </a:p>
         </p:txBody>
@@ -49585,7 +49709,7 @@
             </a:pPr>
             <a:r>
               <a:rPr lang="en-GB" dirty="0"/>
-              <a:t>Done, and open</a:t>
+              <a:t>A route is composed, never stored</a:t>
             </a:r>
           </a:p>
         </p:txBody>
@@ -49605,41 +49729,45 @@
           <a:bodyPr/>
           <a:lstStyle/>
           <a:p>
+            <a:pPr/>
+            <a:r>
+              <a:rPr lang="en-GB" dirty="0"/>
+              <a:t>An instrument's channel is fixed, whichever pin you measure</a:t>
+            </a:r>
+          </a:p>
+          <a:p>
+            <a:pPr/>
+            <a:r>
+              <a:rPr lang="en-GB" dirty="0"/>
+              <a:t>A connector pin's channel is fixed, whichever instrument measures it</a:t>
+            </a:r>
+          </a:p>
+          <a:p>
+            <a:pPr/>
+            <a:r>
+              <a:rPr lang="en-GB" dirty="0"/>
+              <a:t>Two independent tables — not one keyed by every (instrument, pin) pair</a:t>
+            </a:r>
+          </a:p>
+          <a:p>
+            <a:pPr/>
+            <a:endParaRPr lang="en-GB"/>
+          </a:p>
+          <a:p>
             <a:pPr marL="0" indent="0">
               <a:buNone/>
             </a:pPr>
+            <a:r>
+              <a:rPr lang="en-GB" dirty="0"/>
+              <a:t>A third table names what is not routed at all: </a:t>
+            </a:r>
             <a:r>
               <a:rPr lang="en-GB" dirty="0">
                 <a:solidFill>
                   <a:srgbClr val="9795FF"/>
                 </a:solidFill>
               </a:rPr>
-              <a:t>Working today. </a:t>
-            </a:r>
-            <a:r>
-              <a:rPr lang="en-GB" dirty="0"/>
-              <a:t>Units and tolerances, routed measurements, a switching fabric, safing, three tolerance variants, session injection and replay, both log streams, the catalog runner and its CLI.</a:t>
-            </a:r>
-          </a:p>
-          <a:p>
-            <a:pPr/>
-            <a:endParaRPr lang="en-GB"/>
-          </a:p>
-          <a:p>
-            <a:pPr marL="0" indent="0">
-              <a:buNone/>
-            </a:pPr>
-            <a:r>
-              <a:rPr lang="en-GB" dirty="0">
-                <a:solidFill>
-                  <a:srgbClr val="9795FF"/>
-                </a:solidFill>
-              </a:rPr>
-              <a:t>Next. </a:t>
-            </a:r>
-            <a:r>
-              <a:rPr lang="en-GB" dirty="0"/>
-              <a:t>A real instrument transport. Moving the remaining runtime wiring check to compile time. Deciding whether a second bench is a fork or a package.</a:t>
+              <a:t>which pin each hard-cabled supply lands on, so nobody invents a relay path to a live rail.</a:t>
             </a:r>
           </a:p>
         </p:txBody>
@@ -49696,7 +49824,32 @@
       </p:grpSpPr>
       <p:sp>
         <p:nvSpPr>
-          <p:cNvPr id="2" name="Title 2"/>
+          <p:cNvPr id="2" name="Kicker 2"/>
+          <p:cNvSpPr>
+            <a:spLocks noGrp="1"/>
+          </p:cNvSpPr>
+          <p:nvPr>
+            <p:ph type="body" sz="quarter" idx="13"/>
+          </p:nvPr>
+        </p:nvSpPr>
+        <p:spPr/>
+        <p:txBody>
+          <a:bodyPr/>
+          <a:lstStyle/>
+          <a:p>
+            <a:pPr marL="0" indent="0">
+              <a:buNone/>
+            </a:pPr>
+            <a:r>
+              <a:rPr lang="en-GB" dirty="0"/>
+              <a:t>Mechanism</a:t>
+            </a:r>
+          </a:p>
+        </p:txBody>
+      </p:sp>
+      <p:sp>
+        <p:nvSpPr>
+          <p:cNvPr id="3" name="Title 3"/>
           <p:cNvSpPr>
             <a:spLocks noGrp="1"/>
           </p:cNvSpPr>
@@ -49714,14 +49867,14 @@
             </a:pPr>
             <a:r>
               <a:rPr lang="en-GB" dirty="0"/>
-              <a:t>In closing</a:t>
+              <a:t>The point is its type</a:t>
             </a:r>
           </a:p>
         </p:txBody>
       </p:sp>
       <p:sp>
         <p:nvSpPr>
-          <p:cNvPr id="3" name="Body 3"/>
+          <p:cNvPr id="4" name="Left 4"/>
           <p:cNvSpPr>
             <a:spLocks noGrp="1"/>
           </p:cNvSpPr>
@@ -49738,30 +49891,301 @@
               <a:buNone/>
             </a:pPr>
             <a:r>
-              <a:rPr lang="en-GB" dirty="0"/>
-              <a:t>The rig should never find your mistake first.</a:t>
-            </a:r>
-          </a:p>
-          <a:p>
-            <a:pPr lvl="1" marL="0" indent="0">
+              <a:rPr lang="en-GB" dirty="0" sz="1200">
+                <a:solidFill>
+                  <a:srgbClr val="9795FF"/>
+                </a:solidFill>
+                <a:latin typeface="Menlo"/>
+                <a:cs typeface="Menlo"/>
+              </a:rPr>
+              <a:t>POINT( Output5V,</a:t>
+            </a:r>
+          </a:p>
+          <a:p>
+            <a:pPr marL="0" indent="0">
+              <a:buNone/>
+            </a:pPr>
+            <a:r>
+              <a:rPr lang="en-GB" dirty="0" sz="1200">
+                <a:solidFill>
+                  <a:srgbClr val="9795FF"/>
+                </a:solidFill>
+                <a:latin typeface="Menlo"/>
+                <a:cs typeface="Menlo"/>
+              </a:rPr>
+              <a:t>       A, 1, 3, ...)</a:t>
+            </a:r>
+          </a:p>
+          <a:p>
+            <a:pPr marL="0" indent="0">
               <a:buNone/>
             </a:pPr>
             <a:endParaRPr lang="en-GB"/>
           </a:p>
           <a:p>
-            <a:pPr lvl="1" marL="0" indent="0">
+            <a:pPr marL="0" indent="0">
               <a:buNone/>
             </a:pPr>
             <a:r>
-              <a:rPr lang="en-GB" dirty="0"/>
-              <a:t>The compiler is cheaper, faster and more thorough than a bench — so everything that can be decided before power-on, is.</a:t>
+              <a:rPr lang="en-GB" dirty="0" sz="1200">
+                <a:solidFill>
+                  <a:srgbClr val="9795FF"/>
+                </a:solidFill>
+                <a:latin typeface="Menlo"/>
+                <a:cs typeface="Menlo"/>
+              </a:rPr>
+              <a:t>// becomes</a:t>
+            </a:r>
+          </a:p>
+          <a:p>
+            <a:pPr marL="0" indent="0">
+              <a:buNone/>
+            </a:pPr>
+            <a:endParaRPr lang="en-GB"/>
+          </a:p>
+          <a:p>
+            <a:pPr marL="0" indent="0">
+              <a:buNone/>
+            </a:pPr>
+            <a:r>
+              <a:rPr lang="en-GB" dirty="0" sz="1200">
+                <a:solidFill>
+                  <a:srgbClr val="9795FF"/>
+                </a:solidFill>
+                <a:latin typeface="Menlo"/>
+                <a:cs typeface="Menlo"/>
+              </a:rPr>
+              <a:t>AdapterPointTag&lt;</a:t>
+            </a:r>
+          </a:p>
+          <a:p>
+            <a:pPr marL="0" indent="0">
+              <a:buNone/>
+            </a:pPr>
+            <a:r>
+              <a:rPr lang="en-GB" dirty="0" sz="1200">
+                <a:solidFill>
+                  <a:srgbClr val="9795FF"/>
+                </a:solidFill>
+                <a:latin typeface="Menlo"/>
+                <a:cs typeface="Menlo"/>
+              </a:rPr>
+              <a:t>  VpcLocation{ A, 1, 3 }&gt;</a:t>
             </a:r>
           </a:p>
         </p:txBody>
       </p:sp>
       <p:sp>
         <p:nvSpPr>
-          <p:cNvPr id="4" name="Footer 4"/>
+          <p:cNvPr id="5" name="Right 5"/>
+          <p:cNvSpPr>
+            <a:spLocks noGrp="1"/>
+          </p:cNvSpPr>
+          <p:nvPr>
+            <p:ph sz="half" idx="2"/>
+          </p:nvPr>
+        </p:nvSpPr>
+        <p:spPr/>
+        <p:txBody>
+          <a:bodyPr/>
+          <a:lstStyle/>
+          <a:p>
+            <a:pPr/>
+            <a:r>
+              <a:rPr lang="en-GB" dirty="0"/>
+              <a:t>A test point's location is a template argument, not runtime data</a:t>
+            </a:r>
+          </a:p>
+          <a:p>
+            <a:pPr/>
+            <a:r>
+              <a:rPr lang="en-GB" dirty="0"/>
+              <a:t>So a point is a struct member — and a typo is “no such member”</a:t>
+            </a:r>
+          </a:p>
+          <a:p>
+            <a:pPr/>
+            <a:r>
+              <a:rPr lang="en-GB" dirty="0"/>
+              <a:t>No name lookup at run time: the point is the lookup result</a:t>
+            </a:r>
+          </a:p>
+          <a:p>
+            <a:pPr/>
+            <a:endParaRPr lang="en-GB"/>
+          </a:p>
+          <a:p>
+            <a:pPr marL="0" indent="0">
+              <a:buNone/>
+            </a:pPr>
+            <a:r>
+              <a:rPr lang="en-GB" dirty="0">
+                <a:solidFill>
+                  <a:srgbClr val="9795FF"/>
+                </a:solidFill>
+              </a:rPr>
+              <a:t>The same trick gives criteria, scope channels and units their errors.</a:t>
+            </a:r>
+          </a:p>
+        </p:txBody>
+      </p:sp>
+      <p:sp>
+        <p:nvSpPr>
+          <p:cNvPr id="6" name="Footer 6"/>
+          <p:cNvSpPr>
+            <a:spLocks noGrp="1"/>
+          </p:cNvSpPr>
+          <p:nvPr>
+            <p:ph type="ftr" sz="quarter" idx="15"/>
+          </p:nvPr>
+        </p:nvSpPr>
+        <p:spPr/>
+        <p:txBody>
+          <a:bodyPr/>
+          <a:lstStyle/>
+          <a:p>
+            <a:pPr marL="0" indent="0">
+              <a:buNone/>
+            </a:pPr>
+            <a:r>
+              <a:rPr lang="en-GB" dirty="0"/>
+              <a:t>Information Classification: INTERNAL</a:t>
+            </a:r>
+          </a:p>
+        </p:txBody>
+      </p:sp>
+    </p:spTree>
+  </p:cSld>
+  <p:clrMapOvr>
+    <a:masterClrMapping/>
+  </p:clrMapOvr>
+</p:sld>
+</file>
+
+<file path=ppt/slides/slide19.xml><?xml version="1.0" encoding="utf-8"?>
+<p:sld xmlns:a="http://schemas.openxmlformats.org/drawingml/2006/main" xmlns:r="http://schemas.openxmlformats.org/officeDocument/2006/relationships" xmlns:p="http://schemas.openxmlformats.org/presentationml/2006/main">
+  <p:cSld>
+    <p:spTree>
+      <p:nvGrpSpPr>
+        <p:cNvPr id="1" name=""/>
+        <p:cNvGrpSpPr/>
+        <p:nvPr/>
+      </p:nvGrpSpPr>
+      <p:grpSpPr>
+        <a:xfrm>
+          <a:off x="0" y="0"/>
+          <a:ext cx="0" cy="0"/>
+          <a:chOff x="0" y="0"/>
+          <a:chExt cx="0" cy="0"/>
+        </a:xfrm>
+      </p:grpSpPr>
+      <p:sp>
+        <p:nvSpPr>
+          <p:cNvPr id="2" name="Kicker 2"/>
+          <p:cNvSpPr>
+            <a:spLocks noGrp="1"/>
+          </p:cNvSpPr>
+          <p:nvPr>
+            <p:ph type="body" sz="quarter" idx="13"/>
+          </p:nvPr>
+        </p:nvSpPr>
+        <p:spPr/>
+        <p:txBody>
+          <a:bodyPr/>
+          <a:lstStyle/>
+          <a:p>
+            <a:pPr marL="0" indent="0">
+              <a:buNone/>
+            </a:pPr>
+            <a:r>
+              <a:rPr lang="en-GB" dirty="0"/>
+              <a:t>Mechanism</a:t>
+            </a:r>
+          </a:p>
+        </p:txBody>
+      </p:sp>
+      <p:sp>
+        <p:nvSpPr>
+          <p:cNvPr id="3" name="Title 3"/>
+          <p:cNvSpPr>
+            <a:spLocks noGrp="1"/>
+          </p:cNvSpPr>
+          <p:nvPr>
+            <p:ph type="title"/>
+          </p:nvPr>
+        </p:nvSpPr>
+        <p:spPr/>
+        <p:txBody>
+          <a:bodyPr/>
+          <a:lstStyle/>
+          <a:p>
+            <a:pPr marL="0" indent="0">
+              <a:buNone/>
+            </a:pPr>
+            <a:r>
+              <a:rPr lang="en-GB" dirty="0"/>
+              <a:t>Derive it, do not assert it</a:t>
+            </a:r>
+          </a:p>
+        </p:txBody>
+      </p:sp>
+      <p:sp>
+        <p:nvSpPr>
+          <p:cNvPr id="4" name="Body 4"/>
+          <p:cNvSpPr>
+            <a:spLocks noGrp="1"/>
+          </p:cNvSpPr>
+          <p:nvPr>
+            <p:ph sz="half" idx="2"/>
+          </p:nvPr>
+        </p:nvSpPr>
+        <p:spPr/>
+        <p:txBody>
+          <a:bodyPr/>
+          <a:lstStyle/>
+          <a:p>
+            <a:pPr/>
+            <a:r>
+              <a:rPr lang="en-GB" dirty="0"/>
+              <a:t>C++26 reflection walks the DUT's own declarations at compile time</a:t>
+            </a:r>
+          </a:p>
+          <a:p>
+            <a:pPr/>
+            <a:r>
+              <a:rPr lang="en-GB" dirty="0"/>
+              <a:t>Every declared point must have a wiring entry — checked by looking, not by a list</a:t>
+            </a:r>
+          </a:p>
+          <a:p>
+            <a:pPr/>
+            <a:r>
+              <a:rPr lang="en-GB" dirty="0"/>
+              <a:t>Enum names, criteria groups and variant tables come from the declarations themselves</a:t>
+            </a:r>
+          </a:p>
+          <a:p>
+            <a:pPr/>
+            <a:endParaRPr lang="en-GB"/>
+          </a:p>
+          <a:p>
+            <a:pPr marL="0" indent="0">
+              <a:buNone/>
+            </a:pPr>
+            <a:r>
+              <a:rPr lang="en-GB" dirty="0">
+                <a:solidFill>
+                  <a:srgbClr val="9795FF"/>
+                </a:solidFill>
+              </a:rPr>
+              <a:t>A static_assert that catches a forgotten edit is worse than a design with nothing to forget.</a:t>
+            </a:r>
+          </a:p>
+        </p:txBody>
+      </p:sp>
+      <p:sp>
+        <p:nvSpPr>
+          <p:cNvPr id="5" name="Footer 5"/>
           <p:cNvSpPr>
             <a:spLocks noGrp="1"/>
           </p:cNvSpPr>
@@ -49829,7 +50253,7 @@
             </a:pPr>
             <a:r>
               <a:rPr lang="en-GB" dirty="0"/>
-              <a:t>The problem</a:t>
+              <a:t>Why bother</a:t>
             </a:r>
           </a:p>
         </p:txBody>
@@ -49854,7 +50278,7 @@
             </a:pPr>
             <a:r>
               <a:rPr lang="en-GB" dirty="0"/>
-              <a:t>A test rig fails in expensive ways</a:t>
+              <a:t>A test suite that passes is not the same as a DUT that works</a:t>
             </a:r>
           </a:p>
         </p:txBody>
@@ -49867,6 +50291,930 @@
           </p:cNvSpPr>
           <p:nvPr>
             <p:ph type="ftr" sz="quarter" idx="17"/>
+          </p:nvPr>
+        </p:nvSpPr>
+        <p:spPr/>
+        <p:txBody>
+          <a:bodyPr/>
+          <a:lstStyle/>
+          <a:p>
+            <a:pPr marL="0" indent="0">
+              <a:buNone/>
+            </a:pPr>
+            <a:r>
+              <a:rPr lang="en-GB" dirty="0"/>
+              <a:t>Information Classification: INTERNAL</a:t>
+            </a:r>
+          </a:p>
+        </p:txBody>
+      </p:sp>
+    </p:spTree>
+  </p:cSld>
+  <p:clrMapOvr>
+    <a:masterClrMapping/>
+  </p:clrMapOvr>
+</p:sld>
+</file>
+
+<file path=ppt/slides/slide20.xml><?xml version="1.0" encoding="utf-8"?>
+<p:sld xmlns:a="http://schemas.openxmlformats.org/drawingml/2006/main" xmlns:r="http://schemas.openxmlformats.org/officeDocument/2006/relationships" xmlns:p="http://schemas.openxmlformats.org/presentationml/2006/main">
+  <p:cSld>
+    <p:spTree>
+      <p:nvGrpSpPr>
+        <p:cNvPr id="1" name=""/>
+        <p:cNvGrpSpPr/>
+        <p:nvPr/>
+      </p:nvGrpSpPr>
+      <p:grpSpPr>
+        <a:xfrm>
+          <a:off x="0" y="0"/>
+          <a:ext cx="0" cy="0"/>
+          <a:chOff x="0" y="0"/>
+          <a:chExt cx="0" cy="0"/>
+        </a:xfrm>
+      </p:grpSpPr>
+      <p:sp>
+        <p:nvSpPr>
+          <p:cNvPr id="2" name="Kicker 2"/>
+          <p:cNvSpPr>
+            <a:spLocks noGrp="1"/>
+          </p:cNvSpPr>
+          <p:nvPr>
+            <p:ph type="body" sz="quarter" idx="13"/>
+          </p:nvPr>
+        </p:nvSpPr>
+        <p:spPr/>
+        <p:txBody>
+          <a:bodyPr/>
+          <a:lstStyle/>
+          <a:p>
+            <a:pPr marL="0" indent="0">
+              <a:buNone/>
+            </a:pPr>
+            <a:r>
+              <a:rPr lang="en-GB" dirty="0"/>
+              <a:t>Mechanism</a:t>
+            </a:r>
+          </a:p>
+        </p:txBody>
+      </p:sp>
+      <p:sp>
+        <p:nvSpPr>
+          <p:cNvPr id="3" name="Title 3"/>
+          <p:cNvSpPr>
+            <a:spLocks noGrp="1"/>
+          </p:cNvSpPr>
+          <p:nvPr>
+            <p:ph type="title"/>
+          </p:nvPr>
+        </p:nvSpPr>
+        <p:spPr/>
+        <p:txBody>
+          <a:bodyPr/>
+          <a:lstStyle/>
+          <a:p>
+            <a:pPr marL="0" indent="0">
+              <a:buNone/>
+            </a:pPr>
+            <a:r>
+              <a:rPr lang="en-GB" dirty="0"/>
+              <a:t>Three test files with no assertions in them</a:t>
+            </a:r>
+          </a:p>
+        </p:txBody>
+      </p:sp>
+      <p:sp>
+        <p:nvSpPr>
+          <p:cNvPr id="4" name="Body 4"/>
+          <p:cNvSpPr>
+            <a:spLocks noGrp="1"/>
+          </p:cNvSpPr>
+          <p:nvPr>
+            <p:ph sz="half" idx="2"/>
+          </p:nvPr>
+        </p:nvSpPr>
+        <p:spPr/>
+        <p:txBody>
+          <a:bodyPr/>
+          <a:lstStyle/>
+          <a:p>
+            <a:pPr/>
+            <a:r>
+              <a:rPr lang="en-GB" dirty="0"/>
+              <a:t>Their entire purpose is to compile — reaching the end means the checks held</a:t>
+            </a:r>
+          </a:p>
+          <a:p>
+            <a:pPr/>
+            <a:r>
+              <a:rPr lang="en-GB" dirty="0"/>
+              <a:t>Wiring coverage, criteria-variant parity, adapter consistency</a:t>
+            </a:r>
+          </a:p>
+          <a:p>
+            <a:pPr/>
+            <a:r>
+              <a:rPr lang="en-GB" dirty="0"/>
+              <a:t>Whatever they prove, they prove for every declaration, not the ones a run happened to reach</a:t>
+            </a:r>
+          </a:p>
+          <a:p>
+            <a:pPr/>
+            <a:endParaRPr lang="en-GB"/>
+          </a:p>
+          <a:p>
+            <a:pPr marL="0" indent="0">
+              <a:buNone/>
+            </a:pPr>
+            <a:r>
+              <a:rPr lang="en-GB" dirty="0">
+                <a:solidFill>
+                  <a:srgbClr val="9795FF"/>
+                </a:solidFill>
+              </a:rPr>
+              <a:t>402 tests in all, 45 of them driving the real binary as a subprocess.</a:t>
+            </a:r>
+          </a:p>
+        </p:txBody>
+      </p:sp>
+      <p:sp>
+        <p:nvSpPr>
+          <p:cNvPr id="5" name="Footer 5"/>
+          <p:cNvSpPr>
+            <a:spLocks noGrp="1"/>
+          </p:cNvSpPr>
+          <p:nvPr>
+            <p:ph type="ftr" sz="quarter" idx="15"/>
+          </p:nvPr>
+        </p:nvSpPr>
+        <p:spPr/>
+        <p:txBody>
+          <a:bodyPr/>
+          <a:lstStyle/>
+          <a:p>
+            <a:pPr marL="0" indent="0">
+              <a:buNone/>
+            </a:pPr>
+            <a:r>
+              <a:rPr lang="en-GB" dirty="0"/>
+              <a:t>Information Classification: INTERNAL</a:t>
+            </a:r>
+          </a:p>
+        </p:txBody>
+      </p:sp>
+    </p:spTree>
+  </p:cSld>
+  <p:clrMapOvr>
+    <a:masterClrMapping/>
+  </p:clrMapOvr>
+</p:sld>
+</file>
+
+<file path=ppt/slides/slide21.xml><?xml version="1.0" encoding="utf-8"?>
+<p:sld xmlns:a="http://schemas.openxmlformats.org/drawingml/2006/main" xmlns:r="http://schemas.openxmlformats.org/officeDocument/2006/relationships" xmlns:p="http://schemas.openxmlformats.org/presentationml/2006/main">
+  <p:cSld>
+    <p:spTree>
+      <p:nvGrpSpPr>
+        <p:cNvPr id="1" name=""/>
+        <p:cNvGrpSpPr/>
+        <p:nvPr/>
+      </p:nvGrpSpPr>
+      <p:grpSpPr>
+        <a:xfrm>
+          <a:off x="0" y="0"/>
+          <a:ext cx="0" cy="0"/>
+          <a:chOff x="0" y="0"/>
+          <a:chExt cx="0" cy="0"/>
+        </a:xfrm>
+      </p:grpSpPr>
+      <p:sp>
+        <p:nvSpPr>
+          <p:cNvPr id="2" name="Kicker 2"/>
+          <p:cNvSpPr>
+            <a:spLocks noGrp="1"/>
+          </p:cNvSpPr>
+          <p:nvPr>
+            <p:ph type="body" sz="quarter" idx="13"/>
+          </p:nvPr>
+        </p:nvSpPr>
+        <p:spPr/>
+        <p:txBody>
+          <a:bodyPr/>
+          <a:lstStyle/>
+          <a:p>
+            <a:pPr marL="0" indent="0">
+              <a:buNone/>
+            </a:pPr>
+            <a:r>
+              <a:rPr lang="en-GB" dirty="0"/>
+              <a:t>Mechanism</a:t>
+            </a:r>
+          </a:p>
+        </p:txBody>
+      </p:sp>
+      <p:sp>
+        <p:nvSpPr>
+          <p:cNvPr id="3" name="Title 3"/>
+          <p:cNvSpPr>
+            <a:spLocks noGrp="1"/>
+          </p:cNvSpPr>
+          <p:nvPr>
+            <p:ph type="title"/>
+          </p:nvPr>
+        </p:nvSpPr>
+        <p:spPr/>
+        <p:txBody>
+          <a:bodyPr/>
+          <a:lstStyle/>
+          <a:p>
+            <a:pPr marL="0" indent="0">
+              <a:buNone/>
+            </a:pPr>
+            <a:r>
+              <a:rPr lang="en-GB" dirty="0"/>
+              <a:t>What is deliberately still runtime</a:t>
+            </a:r>
+          </a:p>
+        </p:txBody>
+      </p:sp>
+      <p:sp>
+        <p:nvSpPr>
+          <p:cNvPr id="4" name="Body 4"/>
+          <p:cNvSpPr>
+            <a:spLocks noGrp="1"/>
+          </p:cNvSpPr>
+          <p:nvPr>
+            <p:ph sz="half" idx="2"/>
+          </p:nvPr>
+        </p:nvSpPr>
+        <p:spPr/>
+        <p:txBody>
+          <a:bodyPr/>
+          <a:lstStyle/>
+          <a:p>
+            <a:pPr/>
+            <a:r>
+              <a:rPr lang="en-GB" dirty="0"/>
+              <a:t>Whether this rig wired a given pin at all</a:t>
+            </a:r>
+          </a:p>
+          <a:p>
+            <a:pPr/>
+            <a:r>
+              <a:rPr lang="en-GB" dirty="0"/>
+              <a:t>Whether an instrument answers, and what it answers</a:t>
+            </a:r>
+          </a:p>
+          <a:p>
+            <a:pPr/>
+            <a:endParaRPr lang="en-GB"/>
+          </a:p>
+          <a:p>
+            <a:pPr marL="0" indent="0">
+              <a:buNone/>
+            </a:pPr>
+            <a:r>
+              <a:rPr lang="en-GB" dirty="0"/>
+              <a:t>A script's translation unit never sees the rig's wiring table, on purpose — and constant evaluation cannot reach across translation units the way linking can. </a:t>
+            </a:r>
+            <a:r>
+              <a:rPr lang="en-GB" dirty="0">
+                <a:solidFill>
+                  <a:srgbClr val="9795FF"/>
+                </a:solidFill>
+              </a:rPr>
+              <a:t>So the check runs where both are visible, and fails your build rather than your run.</a:t>
+            </a:r>
+          </a:p>
+        </p:txBody>
+      </p:sp>
+      <p:sp>
+        <p:nvSpPr>
+          <p:cNvPr id="5" name="Footer 5"/>
+          <p:cNvSpPr>
+            <a:spLocks noGrp="1"/>
+          </p:cNvSpPr>
+          <p:nvPr>
+            <p:ph type="ftr" sz="quarter" idx="15"/>
+          </p:nvPr>
+        </p:nvSpPr>
+        <p:spPr/>
+        <p:txBody>
+          <a:bodyPr/>
+          <a:lstStyle/>
+          <a:p>
+            <a:pPr marL="0" indent="0">
+              <a:buNone/>
+            </a:pPr>
+            <a:r>
+              <a:rPr lang="en-GB" dirty="0"/>
+              <a:t>Information Classification: INTERNAL</a:t>
+            </a:r>
+          </a:p>
+        </p:txBody>
+      </p:sp>
+    </p:spTree>
+  </p:cSld>
+  <p:clrMapOvr>
+    <a:masterClrMapping/>
+  </p:clrMapOvr>
+</p:sld>
+</file>
+
+<file path=ppt/slides/slide22.xml><?xml version="1.0" encoding="utf-8"?>
+<p:sld xmlns:a="http://schemas.openxmlformats.org/drawingml/2006/main" xmlns:r="http://schemas.openxmlformats.org/officeDocument/2006/relationships" xmlns:p="http://schemas.openxmlformats.org/presentationml/2006/main">
+  <p:cSld>
+    <p:spTree>
+      <p:nvGrpSpPr>
+        <p:cNvPr id="1" name=""/>
+        <p:cNvGrpSpPr/>
+        <p:nvPr/>
+      </p:nvGrpSpPr>
+      <p:grpSpPr>
+        <a:xfrm>
+          <a:off x="0" y="0"/>
+          <a:ext cx="0" cy="0"/>
+          <a:chOff x="0" y="0"/>
+          <a:chExt cx="0" cy="0"/>
+        </a:xfrm>
+      </p:grpSpPr>
+      <p:sp>
+        <p:nvSpPr>
+          <p:cNvPr id="2" name="Kicker 2"/>
+          <p:cNvSpPr>
+            <a:spLocks noGrp="1"/>
+          </p:cNvSpPr>
+          <p:nvPr>
+            <p:ph type="body" sz="quarter" idx="15"/>
+          </p:nvPr>
+        </p:nvSpPr>
+        <p:spPr/>
+        <p:txBody>
+          <a:bodyPr/>
+          <a:lstStyle/>
+          <a:p>
+            <a:pPr marL="0" indent="0">
+              <a:buNone/>
+            </a:pPr>
+            <a:r>
+              <a:rPr lang="en-GB" dirty="0"/>
+              <a:t>Honestly</a:t>
+            </a:r>
+          </a:p>
+        </p:txBody>
+      </p:sp>
+      <p:sp>
+        <p:nvSpPr>
+          <p:cNvPr id="3" name="Title 3"/>
+          <p:cNvSpPr>
+            <a:spLocks noGrp="1"/>
+          </p:cNvSpPr>
+          <p:nvPr>
+            <p:ph type="title"/>
+          </p:nvPr>
+        </p:nvSpPr>
+        <p:spPr/>
+        <p:txBody>
+          <a:bodyPr/>
+          <a:lstStyle/>
+          <a:p>
+            <a:pPr marL="0" indent="0">
+              <a:buNone/>
+            </a:pPr>
+            <a:r>
+              <a:rPr lang="en-GB" dirty="0"/>
+              <a:t>What this buys, and what it costs</a:t>
+            </a:r>
+          </a:p>
+        </p:txBody>
+      </p:sp>
+      <p:sp>
+        <p:nvSpPr>
+          <p:cNvPr id="4" name="Footer 4"/>
+          <p:cNvSpPr>
+            <a:spLocks noGrp="1"/>
+          </p:cNvSpPr>
+          <p:nvPr>
+            <p:ph type="ftr" sz="quarter" idx="17"/>
+          </p:nvPr>
+        </p:nvSpPr>
+        <p:spPr/>
+        <p:txBody>
+          <a:bodyPr/>
+          <a:lstStyle/>
+          <a:p>
+            <a:pPr marL="0" indent="0">
+              <a:buNone/>
+            </a:pPr>
+            <a:r>
+              <a:rPr lang="en-GB" dirty="0"/>
+              <a:t>Information Classification: INTERNAL</a:t>
+            </a:r>
+          </a:p>
+        </p:txBody>
+      </p:sp>
+    </p:spTree>
+  </p:cSld>
+  <p:clrMapOvr>
+    <a:masterClrMapping/>
+  </p:clrMapOvr>
+</p:sld>
+</file>
+
+<file path=ppt/slides/slide23.xml><?xml version="1.0" encoding="utf-8"?>
+<p:sld xmlns:a="http://schemas.openxmlformats.org/drawingml/2006/main" xmlns:r="http://schemas.openxmlformats.org/officeDocument/2006/relationships" xmlns:p="http://schemas.openxmlformats.org/presentationml/2006/main">
+  <p:cSld>
+    <p:spTree>
+      <p:nvGrpSpPr>
+        <p:cNvPr id="1" name=""/>
+        <p:cNvGrpSpPr/>
+        <p:nvPr/>
+      </p:nvGrpSpPr>
+      <p:grpSpPr>
+        <a:xfrm>
+          <a:off x="0" y="0"/>
+          <a:ext cx="0" cy="0"/>
+          <a:chOff x="0" y="0"/>
+          <a:chExt cx="0" cy="0"/>
+        </a:xfrm>
+      </p:grpSpPr>
+      <p:sp>
+        <p:nvSpPr>
+          <p:cNvPr id="2" name="Kicker 2"/>
+          <p:cNvSpPr>
+            <a:spLocks noGrp="1"/>
+          </p:cNvSpPr>
+          <p:nvPr>
+            <p:ph type="body" sz="quarter" idx="13"/>
+          </p:nvPr>
+        </p:nvSpPr>
+        <p:spPr/>
+        <p:txBody>
+          <a:bodyPr/>
+          <a:lstStyle/>
+          <a:p>
+            <a:pPr marL="0" indent="0">
+              <a:buNone/>
+            </a:pPr>
+            <a:r>
+              <a:rPr lang="en-GB" dirty="0"/>
+              <a:t>Honestly</a:t>
+            </a:r>
+          </a:p>
+        </p:txBody>
+      </p:sp>
+      <p:sp>
+        <p:nvSpPr>
+          <p:cNvPr id="3" name="Title 3"/>
+          <p:cNvSpPr>
+            <a:spLocks noGrp="1"/>
+          </p:cNvSpPr>
+          <p:nvPr>
+            <p:ph type="title"/>
+          </p:nvPr>
+        </p:nvSpPr>
+        <p:spPr/>
+        <p:txBody>
+          <a:bodyPr/>
+          <a:lstStyle/>
+          <a:p>
+            <a:pPr marL="0" indent="0">
+              <a:buNone/>
+            </a:pPr>
+            <a:r>
+              <a:rPr lang="en-GB" dirty="0"/>
+              <a:t>Pros and cons</a:t>
+            </a:r>
+          </a:p>
+        </p:txBody>
+      </p:sp>
+      <p:sp>
+        <p:nvSpPr>
+          <p:cNvPr id="4" name="Left 4"/>
+          <p:cNvSpPr>
+            <a:spLocks noGrp="1"/>
+          </p:cNvSpPr>
+          <p:nvPr>
+            <p:ph sz="half" idx="1"/>
+          </p:nvPr>
+        </p:nvSpPr>
+        <p:spPr/>
+        <p:txBody>
+          <a:bodyPr/>
+          <a:lstStyle/>
+          <a:p>
+            <a:pPr marL="0" indent="0">
+              <a:buNone/>
+            </a:pPr>
+            <a:r>
+              <a:rPr lang="en-GB" dirty="0">
+                <a:solidFill>
+                  <a:srgbClr val="9795FF"/>
+                </a:solidFill>
+              </a:rPr>
+              <a:t>Strengths</a:t>
+            </a:r>
+          </a:p>
+          <a:p>
+            <a:pPr/>
+            <a:endParaRPr lang="en-GB"/>
+          </a:p>
+          <a:p>
+            <a:pPr/>
+            <a:r>
+              <a:rPr lang="en-GB" dirty="0"/>
+              <a:t>Whole classes of mistake cannot reach the bench</a:t>
+            </a:r>
+          </a:p>
+          <a:p>
+            <a:pPr/>
+            <a:r>
+              <a:rPr lang="en-GB" dirty="0"/>
+              <a:t>Scripts trace straight to the spec</a:t>
+            </a:r>
+          </a:p>
+          <a:p>
+            <a:pPr/>
+            <a:r>
+              <a:rPr lang="en-GB" dirty="0"/>
+              <a:t>Operator view and machine record cannot disagree</a:t>
+            </a:r>
+          </a:p>
+          <a:p>
+            <a:pPr/>
+            <a:r>
+              <a:rPr lang="en-GB" dirty="0"/>
+              <a:t>Scripts testable with no hardware</a:t>
+            </a:r>
+          </a:p>
+          <a:p>
+            <a:pPr/>
+            <a:r>
+              <a:rPr lang="en-GB" dirty="0"/>
+              <a:t>One tolerance value, three tables</a:t>
+            </a:r>
+          </a:p>
+          <a:p>
+            <a:pPr/>
+            <a:r>
+              <a:rPr lang="en-GB" dirty="0"/>
+              <a:t>Reusable across benches</a:t>
+            </a:r>
+          </a:p>
+        </p:txBody>
+      </p:sp>
+      <p:sp>
+        <p:nvSpPr>
+          <p:cNvPr id="5" name="Right 5"/>
+          <p:cNvSpPr>
+            <a:spLocks noGrp="1"/>
+          </p:cNvSpPr>
+          <p:nvPr>
+            <p:ph sz="half" idx="2"/>
+          </p:nvPr>
+        </p:nvSpPr>
+        <p:spPr/>
+        <p:txBody>
+          <a:bodyPr/>
+          <a:lstStyle/>
+          <a:p>
+            <a:pPr marL="0" indent="0">
+              <a:buNone/>
+            </a:pPr>
+            <a:r>
+              <a:rPr lang="en-GB" dirty="0">
+                <a:solidFill>
+                  <a:srgbClr val="9795FF"/>
+                </a:solidFill>
+              </a:rPr>
+              <a:t>Costs and risks</a:t>
+            </a:r>
+          </a:p>
+          <a:p>
+            <a:pPr/>
+            <a:endParaRPr lang="en-GB"/>
+          </a:p>
+          <a:p>
+            <a:pPr/>
+            <a:r>
+              <a:rPr lang="en-GB" dirty="0"/>
+              <a:t>Experimental C++26; GCC 16 only</a:t>
+            </a:r>
+          </a:p>
+          <a:p>
+            <a:pPr/>
+            <a:r>
+              <a:rPr lang="en-GB" dirty="0"/>
+              <a:t>New scripts need a developer, not a spreadsheet</a:t>
+            </a:r>
+          </a:p>
+          <a:p>
+            <a:pPr/>
+            <a:r>
+              <a:rPr lang="en-GB" dirty="0"/>
+              <a:t>Wiring changes mean a rebuild</a:t>
+            </a:r>
+          </a:p>
+          <a:p>
+            <a:pPr/>
+            <a:r>
+              <a:rPr lang="en-GB" dirty="0"/>
+              <a:t>Few engineers have used reflection</a:t>
+            </a:r>
+          </a:p>
+          <a:p>
+            <a:pPr/>
+            <a:r>
+              <a:rPr lang="en-GB" dirty="0"/>
+              <a:t>Instrument drivers still simulated</a:t>
+            </a:r>
+          </a:p>
+          <a:p>
+            <a:pPr/>
+            <a:r>
+              <a:rPr lang="en-GB" dirty="0"/>
+              <a:t>Template errors can be verbose</a:t>
+            </a:r>
+          </a:p>
+        </p:txBody>
+      </p:sp>
+      <p:sp>
+        <p:nvSpPr>
+          <p:cNvPr id="6" name="Footer 6"/>
+          <p:cNvSpPr>
+            <a:spLocks noGrp="1"/>
+          </p:cNvSpPr>
+          <p:nvPr>
+            <p:ph type="ftr" sz="quarter" idx="15"/>
+          </p:nvPr>
+        </p:nvSpPr>
+        <p:spPr/>
+        <p:txBody>
+          <a:bodyPr/>
+          <a:lstStyle/>
+          <a:p>
+            <a:pPr marL="0" indent="0">
+              <a:buNone/>
+            </a:pPr>
+            <a:r>
+              <a:rPr lang="en-GB" dirty="0"/>
+              <a:t>Information Classification: INTERNAL</a:t>
+            </a:r>
+          </a:p>
+        </p:txBody>
+      </p:sp>
+    </p:spTree>
+  </p:cSld>
+  <p:clrMapOvr>
+    <a:masterClrMapping/>
+  </p:clrMapOvr>
+</p:sld>
+</file>
+
+<file path=ppt/slides/slide24.xml><?xml version="1.0" encoding="utf-8"?>
+<p:sld xmlns:a="http://schemas.openxmlformats.org/drawingml/2006/main" xmlns:r="http://schemas.openxmlformats.org/officeDocument/2006/relationships" xmlns:p="http://schemas.openxmlformats.org/presentationml/2006/main">
+  <p:cSld>
+    <p:spTree>
+      <p:nvGrpSpPr>
+        <p:cNvPr id="1" name=""/>
+        <p:cNvGrpSpPr/>
+        <p:nvPr/>
+      </p:nvGrpSpPr>
+      <p:grpSpPr>
+        <a:xfrm>
+          <a:off x="0" y="0"/>
+          <a:ext cx="0" cy="0"/>
+          <a:chOff x="0" y="0"/>
+          <a:chExt cx="0" cy="0"/>
+        </a:xfrm>
+      </p:grpSpPr>
+      <p:sp>
+        <p:nvSpPr>
+          <p:cNvPr id="2" name="Kicker 2"/>
+          <p:cNvSpPr>
+            <a:spLocks noGrp="1"/>
+          </p:cNvSpPr>
+          <p:nvPr>
+            <p:ph type="body" sz="quarter" idx="13"/>
+          </p:nvPr>
+        </p:nvSpPr>
+        <p:spPr/>
+        <p:txBody>
+          <a:bodyPr/>
+          <a:lstStyle/>
+          <a:p>
+            <a:pPr marL="0" indent="0">
+              <a:buNone/>
+            </a:pPr>
+            <a:r>
+              <a:rPr lang="en-GB" dirty="0"/>
+              <a:t>Honestly</a:t>
+            </a:r>
+          </a:p>
+        </p:txBody>
+      </p:sp>
+      <p:sp>
+        <p:nvSpPr>
+          <p:cNvPr id="3" name="Title 3"/>
+          <p:cNvSpPr>
+            <a:spLocks noGrp="1"/>
+          </p:cNvSpPr>
+          <p:nvPr>
+            <p:ph type="title"/>
+          </p:nvPr>
+        </p:nvSpPr>
+        <p:spPr/>
+        <p:txBody>
+          <a:bodyPr/>
+          <a:lstStyle/>
+          <a:p>
+            <a:pPr marL="0" indent="0">
+              <a:buNone/>
+            </a:pPr>
+            <a:r>
+              <a:rPr lang="en-GB" dirty="0"/>
+              <a:t>Done, and open</a:t>
+            </a:r>
+          </a:p>
+        </p:txBody>
+      </p:sp>
+      <p:sp>
+        <p:nvSpPr>
+          <p:cNvPr id="4" name="Body 4"/>
+          <p:cNvSpPr>
+            <a:spLocks noGrp="1"/>
+          </p:cNvSpPr>
+          <p:nvPr>
+            <p:ph sz="half" idx="2"/>
+          </p:nvPr>
+        </p:nvSpPr>
+        <p:spPr/>
+        <p:txBody>
+          <a:bodyPr/>
+          <a:lstStyle/>
+          <a:p>
+            <a:pPr marL="0" indent="0">
+              <a:buNone/>
+            </a:pPr>
+            <a:r>
+              <a:rPr lang="en-GB" dirty="0">
+                <a:solidFill>
+                  <a:srgbClr val="9795FF"/>
+                </a:solidFill>
+              </a:rPr>
+              <a:t>Working today. </a:t>
+            </a:r>
+            <a:r>
+              <a:rPr lang="en-GB" dirty="0"/>
+              <a:t>Units and tolerances, routed measurements, the switching fabric, safing, three tolerance variants, injection and replay, both log streams, four drivers, the catalog runner and its CLI.</a:t>
+            </a:r>
+          </a:p>
+          <a:p>
+            <a:pPr/>
+            <a:endParaRPr lang="en-GB"/>
+          </a:p>
+          <a:p>
+            <a:pPr marL="0" indent="0">
+              <a:buNone/>
+            </a:pPr>
+            <a:r>
+              <a:rPr lang="en-GB" dirty="0">
+                <a:solidFill>
+                  <a:srgbClr val="9795FF"/>
+                </a:solidFill>
+              </a:rPr>
+              <a:t>Next. </a:t>
+            </a:r>
+            <a:r>
+              <a:rPr lang="en-GB" dirty="0"/>
+              <a:t>A real instrument transport, so the drivers talk to hardware instead of a simulation. Then per-phase angle on the AC source, and deciding whether a second bench is a fork or a package.</a:t>
+            </a:r>
+          </a:p>
+        </p:txBody>
+      </p:sp>
+      <p:sp>
+        <p:nvSpPr>
+          <p:cNvPr id="5" name="Footer 5"/>
+          <p:cNvSpPr>
+            <a:spLocks noGrp="1"/>
+          </p:cNvSpPr>
+          <p:nvPr>
+            <p:ph type="ftr" sz="quarter" idx="15"/>
+          </p:nvPr>
+        </p:nvSpPr>
+        <p:spPr/>
+        <p:txBody>
+          <a:bodyPr/>
+          <a:lstStyle/>
+          <a:p>
+            <a:pPr marL="0" indent="0">
+              <a:buNone/>
+            </a:pPr>
+            <a:r>
+              <a:rPr lang="en-GB" dirty="0"/>
+              <a:t>Information Classification: INTERNAL</a:t>
+            </a:r>
+          </a:p>
+        </p:txBody>
+      </p:sp>
+    </p:spTree>
+  </p:cSld>
+  <p:clrMapOvr>
+    <a:masterClrMapping/>
+  </p:clrMapOvr>
+</p:sld>
+</file>
+
+<file path=ppt/slides/slide25.xml><?xml version="1.0" encoding="utf-8"?>
+<p:sld xmlns:a="http://schemas.openxmlformats.org/drawingml/2006/main" xmlns:r="http://schemas.openxmlformats.org/officeDocument/2006/relationships" xmlns:p="http://schemas.openxmlformats.org/presentationml/2006/main">
+  <p:cSld>
+    <p:spTree>
+      <p:nvGrpSpPr>
+        <p:cNvPr id="1" name=""/>
+        <p:cNvGrpSpPr/>
+        <p:nvPr/>
+      </p:nvGrpSpPr>
+      <p:grpSpPr>
+        <a:xfrm>
+          <a:off x="0" y="0"/>
+          <a:ext cx="0" cy="0"/>
+          <a:chOff x="0" y="0"/>
+          <a:chExt cx="0" cy="0"/>
+        </a:xfrm>
+      </p:grpSpPr>
+      <p:sp>
+        <p:nvSpPr>
+          <p:cNvPr id="2" name="Title 2"/>
+          <p:cNvSpPr>
+            <a:spLocks noGrp="1"/>
+          </p:cNvSpPr>
+          <p:nvPr>
+            <p:ph type="title"/>
+          </p:nvPr>
+        </p:nvSpPr>
+        <p:spPr/>
+        <p:txBody>
+          <a:bodyPr/>
+          <a:lstStyle/>
+          <a:p>
+            <a:pPr marL="0" indent="0">
+              <a:buNone/>
+            </a:pPr>
+            <a:r>
+              <a:rPr lang="en-GB" dirty="0"/>
+              <a:t>In closing</a:t>
+            </a:r>
+          </a:p>
+        </p:txBody>
+      </p:sp>
+      <p:sp>
+        <p:nvSpPr>
+          <p:cNvPr id="3" name="Body 3"/>
+          <p:cNvSpPr>
+            <a:spLocks noGrp="1"/>
+          </p:cNvSpPr>
+          <p:nvPr>
+            <p:ph sz="half" idx="1"/>
+          </p:nvPr>
+        </p:nvSpPr>
+        <p:spPr/>
+        <p:txBody>
+          <a:bodyPr/>
+          <a:lstStyle/>
+          <a:p>
+            <a:pPr marL="0" indent="0">
+              <a:buNone/>
+            </a:pPr>
+            <a:r>
+              <a:rPr lang="en-GB" dirty="0"/>
+              <a:t>The rig should never find your mistake first.</a:t>
+            </a:r>
+          </a:p>
+          <a:p>
+            <a:pPr lvl="1" marL="0" indent="0">
+              <a:buNone/>
+            </a:pPr>
+            <a:endParaRPr lang="en-GB"/>
+          </a:p>
+          <a:p>
+            <a:pPr lvl="1" marL="0" indent="0">
+              <a:buNone/>
+            </a:pPr>
+            <a:r>
+              <a:rPr lang="en-GB" dirty="0"/>
+              <a:t>You write the test and the tolerance. Everything that can be decided before power-on already has been.</a:t>
+            </a:r>
+          </a:p>
+        </p:txBody>
+      </p:sp>
+      <p:sp>
+        <p:nvSpPr>
+          <p:cNvPr id="4" name="Footer 4"/>
+          <p:cNvSpPr>
+            <a:spLocks noGrp="1"/>
+          </p:cNvSpPr>
+          <p:nvPr>
+            <p:ph type="ftr" sz="quarter" idx="15"/>
           </p:nvPr>
         </p:nvSpPr>
         <p:spPr/>
@@ -49929,7 +51277,7 @@
             </a:pPr>
             <a:r>
               <a:rPr lang="en-GB" dirty="0"/>
-              <a:t>The problem</a:t>
+              <a:t>Why bother</a:t>
             </a:r>
           </a:p>
         </p:txBody>
@@ -49954,7 +51302,7 @@
             </a:pPr>
             <a:r>
               <a:rPr lang="en-GB" dirty="0"/>
-              <a:t>Four ways a test suite lies to you</a:t>
+              <a:t>Four ways a suite lies to you</a:t>
             </a:r>
           </a:p>
         </p:txBody>
@@ -49991,14 +51339,14 @@
             <a:pPr/>
             <a:r>
               <a:rPr lang="en-GB" dirty="0"/>
-              <a:t>A relay path nobody wired up — throws three hours into a soak test</a:t>
+              <a:t>A relay path nobody wired up — throws three hours into a soak run</a:t>
             </a:r>
           </a:p>
           <a:p>
             <a:pPr/>
             <a:r>
               <a:rPr lang="en-GB" dirty="0"/>
-              <a:t>A tolerance table edited for one variant, not the others</a:t>
+              <a:t>A tolerance edited for one variant, not the others</a:t>
             </a:r>
           </a:p>
           <a:p>
@@ -50015,7 +51363,7 @@
                   <a:srgbClr val="9795FF"/>
                 </a:solidFill>
               </a:rPr>
-              <a:t>Every one of these is a static fact.</a:t>
+              <a:t>Every one of these is a static fact about your test.</a:t>
             </a:r>
           </a:p>
           <a:p>
@@ -50024,7 +51372,7 @@
             </a:pPr>
             <a:r>
               <a:rPr lang="en-GB" dirty="0"/>
-              <a:t>None of them needs a running rig to discover.</a:t>
+              <a:t>None of them needs a powered rig to discover.</a:t>
             </a:r>
           </a:p>
         </p:txBody>
@@ -50133,7 +51481,7 @@
             </a:pPr>
             <a:r>
               <a:rPr lang="en-GB" dirty="0"/>
-              <a:t>Runtime checks are a last resort — and each one is a documented concession.</a:t>
+              <a:t>Runtime checks are a last resort — and every one of them is a documented concession.</a:t>
             </a:r>
           </a:p>
         </p:txBody>
@@ -50208,7 +51556,7 @@
             </a:pPr>
             <a:r>
               <a:rPr lang="en-GB" dirty="0"/>
-              <a:t>How it works</a:t>
+              <a:t>Act 1</a:t>
             </a:r>
           </a:p>
         </p:txBody>
@@ -50233,7 +51581,7 @@
             </a:pPr>
             <a:r>
               <a:rPr lang="en-GB" dirty="0"/>
-              <a:t>A test script reads like the test specification</a:t>
+              <a:t>What you get, as the person writing the tests</a:t>
             </a:r>
           </a:p>
         </p:txBody>
@@ -50308,7 +51656,7 @@
             </a:pPr>
             <a:r>
               <a:rPr lang="en-GB" dirty="0"/>
-              <a:t>How it works</a:t>
+              <a:t>Writing a test</a:t>
             </a:r>
           </a:p>
         </p:txBody>
@@ -50333,143 +51681,14 @@
             </a:pPr>
             <a:r>
               <a:rPr lang="en-GB" dirty="0"/>
-              <a:t>What a script never mentions</a:t>
+              <a:t>Three files, and none of them are machinery</a:t>
             </a:r>
           </a:p>
         </p:txBody>
       </p:sp>
       <p:sp>
         <p:nvSpPr>
-          <p:cNvPr id="4" name="Left 4"/>
-          <p:cNvSpPr>
-            <a:spLocks noGrp="1"/>
-          </p:cNvSpPr>
-          <p:nvPr>
-            <p:ph sz="half" idx="1"/>
-          </p:nvPr>
-        </p:nvSpPr>
-        <p:spPr/>
-        <p:txBody>
-          <a:bodyPr/>
-          <a:lstStyle/>
-          <a:p>
-            <a:pPr marL="0" indent="0">
-              <a:buNone/>
-            </a:pPr>
-            <a:r>
-              <a:rPr lang="en-GB" dirty="0">
-                <a:solidFill>
-                  <a:srgbClr val="9795FF"/>
-                </a:solidFill>
-              </a:rPr>
-              <a:t>The whole test</a:t>
-            </a:r>
-          </a:p>
-          <a:p>
-            <a:pPr/>
-            <a:endParaRPr lang="en-GB"/>
-          </a:p>
-          <a:p>
-            <a:pPr marL="0" indent="0">
-              <a:buNone/>
-            </a:pPr>
-            <a:r>
-              <a:rPr lang="en-GB" dirty="0" sz="1200">
-                <a:solidFill>
-                  <a:srgbClr val="9795FF"/>
-                </a:solidFill>
-                <a:latin typeface="Menlo"/>
-                <a:cs typeface="Menlo"/>
-              </a:rPr>
-              <a:t>auto rail = Measure(</a:t>
-            </a:r>
-          </a:p>
-          <a:p>
-            <a:pPr marL="0" indent="0">
-              <a:buNone/>
-            </a:pPr>
-            <a:r>
-              <a:rPr lang="en-GB" dirty="0" sz="1200">
-                <a:solidFill>
-                  <a:srgbClr val="9795FF"/>
-                </a:solidFill>
-                <a:latin typeface="Menlo"/>
-                <a:cs typeface="Menlo"/>
-              </a:rPr>
-              <a:t>    Dmm1.voltage(),</a:t>
-            </a:r>
-          </a:p>
-          <a:p>
-            <a:pPr marL="0" indent="0">
-              <a:buNone/>
-            </a:pPr>
-            <a:r>
-              <a:rPr lang="en-GB" dirty="0" sz="1200">
-                <a:solidFill>
-                  <a:srgbClr val="9795FF"/>
-                </a:solidFill>
-                <a:latin typeface="Menlo"/>
-                <a:cs typeface="Menlo"/>
-              </a:rPr>
-              <a:t>    at( DeviceX::Output5V));</a:t>
-            </a:r>
-          </a:p>
-          <a:p>
-            <a:pPr marL="0" indent="0">
-              <a:buNone/>
-            </a:pPr>
-            <a:endParaRPr lang="en-GB"/>
-          </a:p>
-          <a:p>
-            <a:pPr marL="0" indent="0">
-              <a:buNone/>
-            </a:pPr>
-            <a:r>
-              <a:rPr lang="en-GB" dirty="0" sz="1200">
-                <a:solidFill>
-                  <a:srgbClr val="9795FF"/>
-                </a:solidFill>
-                <a:latin typeface="Menlo"/>
-                <a:cs typeface="Menlo"/>
-              </a:rPr>
-              <a:t>Verify(</a:t>
-            </a:r>
-          </a:p>
-          <a:p>
-            <a:pPr marL="0" indent="0">
-              <a:buNone/>
-            </a:pPr>
-            <a:r>
-              <a:rPr lang="en-GB" dirty="0" sz="1200">
-                <a:solidFill>
-                  <a:srgbClr val="9795FF"/>
-                </a:solidFill>
-                <a:latin typeface="Menlo"/>
-                <a:cs typeface="Menlo"/>
-              </a:rPr>
-              <a:t>    FS_Supply_1::FS_Supply_5V0,</a:t>
-            </a:r>
-          </a:p>
-          <a:p>
-            <a:pPr marL="0" indent="0">
-              <a:buNone/>
-            </a:pPr>
-            <a:r>
-              <a:rPr lang="en-GB" dirty="0" sz="1200">
-                <a:solidFill>
-                  <a:srgbClr val="9795FF"/>
-                </a:solidFill>
-                <a:latin typeface="Menlo"/>
-                <a:cs typeface="Menlo"/>
-              </a:rPr>
-              <a:t>    rail);</a:t>
-            </a:r>
-          </a:p>
-        </p:txBody>
-      </p:sp>
-      <p:sp>
-        <p:nvSpPr>
-          <p:cNvPr id="5" name="Right 5"/>
+          <p:cNvPr id="4" name="Body 4"/>
           <p:cNvSpPr>
             <a:spLocks noGrp="1"/>
           </p:cNvSpPr>
@@ -50482,79 +51701,72 @@
           <a:bodyPr/>
           <a:lstStyle/>
           <a:p>
-            <a:pPr marL="0" indent="0">
-              <a:buNone/>
-            </a:pPr>
+            <a:pPr/>
             <a:r>
               <a:rPr lang="en-GB" dirty="0">
                 <a:solidFill>
                   <a:srgbClr val="9795FF"/>
                 </a:solidFill>
               </a:rPr>
-              <a:t>Nowhere in it</a:t>
+              <a:t>The tolerance. </a:t>
+            </a:r>
+            <a:r>
+              <a:rPr lang="en-GB" dirty="0"/>
+              <a:t>A row in your DUT's criteria table — value, unit, and the wording from the spec.</a:t>
             </a:r>
           </a:p>
           <a:p>
             <a:pPr/>
-            <a:endParaRPr lang="en-GB"/>
-          </a:p>
-          <a:p>
-            <a:pPr/>
-            <a:r>
-              <a:rPr lang="en-GB" dirty="0"/>
-              <a:t>Instrument address</a:t>
-            </a:r>
-          </a:p>
-          <a:p>
-            <a:pPr/>
-            <a:r>
-              <a:rPr lang="en-GB" dirty="0"/>
-              <a:t>Relay path or channel numbers</a:t>
-            </a:r>
-          </a:p>
-          <a:p>
-            <a:pPr/>
-            <a:r>
-              <a:rPr lang="en-GB" dirty="0"/>
-              <a:t>Unit conversion</a:t>
-            </a:r>
-          </a:p>
-          <a:p>
-            <a:pPr/>
-            <a:r>
-              <a:rPr lang="en-GB" dirty="0"/>
-              <a:t>Tolerance value</a:t>
-            </a:r>
-          </a:p>
-          <a:p>
-            <a:pPr/>
-            <a:r>
-              <a:rPr lang="en-GB" dirty="0"/>
-              <a:t>A single logging call</a:t>
-            </a:r>
-          </a:p>
-          <a:p>
-            <a:pPr/>
-            <a:endParaRPr lang="en-GB"/>
-          </a:p>
-          <a:p>
-            <a:pPr marL="0" indent="0">
-              <a:buNone/>
-            </a:pPr>
             <a:r>
               <a:rPr lang="en-GB" dirty="0">
                 <a:solidFill>
                   <a:srgbClr val="9795FF"/>
                 </a:solidFill>
               </a:rPr>
-              <a:t>All resolved elsewhere — most of it by the compiler.</a:t>
+              <a:t>The script. </a:t>
+            </a:r>
+            <a:r>
+              <a:rPr lang="en-GB" dirty="0"/>
+              <a:t>Measure, verify, done. Reads like the procedure it came from.</a:t>
+            </a:r>
+          </a:p>
+          <a:p>
+            <a:pPr/>
+            <a:r>
+              <a:rPr lang="en-GB" dirty="0">
+                <a:solidFill>
+                  <a:srgbClr val="9795FF"/>
+                </a:solidFill>
+              </a:rPr>
+              <a:t>The catalog line. </a:t>
+            </a:r>
+            <a:r>
+              <a:rPr lang="en-GB" dirty="0"/>
+              <a:t>One row naming the group, the id and the description an operator will see.</a:t>
+            </a:r>
+          </a:p>
+          <a:p>
+            <a:pPr/>
+            <a:endParaRPr lang="en-GB"/>
+          </a:p>
+          <a:p>
+            <a:pPr marL="0" indent="0">
+              <a:buNone/>
+            </a:pPr>
+            <a:r>
+              <a:rPr lang="en-GB" dirty="0">
+                <a:solidFill>
+                  <a:srgbClr val="9795FF"/>
+                </a:solidFill>
+              </a:rPr>
+              <a:t>Everything else — addresses, relays, units, logging — already exists.</a:t>
             </a:r>
           </a:p>
         </p:txBody>
       </p:sp>
       <p:sp>
         <p:nvSpPr>
-          <p:cNvPr id="6" name="Footer 6"/>
+          <p:cNvPr id="5" name="Footer 5"/>
           <p:cNvSpPr>
             <a:spLocks noGrp="1"/>
           </p:cNvSpPr>
@@ -50622,7 +51834,7 @@
             </a:pPr>
             <a:r>
               <a:rPr lang="en-GB" dirty="0"/>
-              <a:t>How it works</a:t>
+              <a:t>Writing a test</a:t>
             </a:r>
           </a:p>
         </p:txBody>
@@ -50647,14 +51859,143 @@
             </a:pPr>
             <a:r>
               <a:rPr lang="en-GB" dirty="0"/>
-              <a:t>Four sources of truth</a:t>
+              <a:t>What a script never mentions</a:t>
             </a:r>
           </a:p>
         </p:txBody>
       </p:sp>
       <p:sp>
         <p:nvSpPr>
-          <p:cNvPr id="4" name="Body 4"/>
+          <p:cNvPr id="4" name="Left 4"/>
+          <p:cNvSpPr>
+            <a:spLocks noGrp="1"/>
+          </p:cNvSpPr>
+          <p:nvPr>
+            <p:ph sz="half" idx="1"/>
+          </p:nvPr>
+        </p:nvSpPr>
+        <p:spPr/>
+        <p:txBody>
+          <a:bodyPr/>
+          <a:lstStyle/>
+          <a:p>
+            <a:pPr marL="0" indent="0">
+              <a:buNone/>
+            </a:pPr>
+            <a:r>
+              <a:rPr lang="en-GB" dirty="0">
+                <a:solidFill>
+                  <a:srgbClr val="9795FF"/>
+                </a:solidFill>
+              </a:rPr>
+              <a:t>The whole test</a:t>
+            </a:r>
+          </a:p>
+          <a:p>
+            <a:pPr/>
+            <a:endParaRPr lang="en-GB"/>
+          </a:p>
+          <a:p>
+            <a:pPr marL="0" indent="0">
+              <a:buNone/>
+            </a:pPr>
+            <a:r>
+              <a:rPr lang="en-GB" dirty="0" sz="1200">
+                <a:solidFill>
+                  <a:srgbClr val="9795FF"/>
+                </a:solidFill>
+                <a:latin typeface="Menlo"/>
+                <a:cs typeface="Menlo"/>
+              </a:rPr>
+              <a:t>auto rail = Measure(</a:t>
+            </a:r>
+          </a:p>
+          <a:p>
+            <a:pPr marL="0" indent="0">
+              <a:buNone/>
+            </a:pPr>
+            <a:r>
+              <a:rPr lang="en-GB" dirty="0" sz="1200">
+                <a:solidFill>
+                  <a:srgbClr val="9795FF"/>
+                </a:solidFill>
+                <a:latin typeface="Menlo"/>
+                <a:cs typeface="Menlo"/>
+              </a:rPr>
+              <a:t>    Dmm1.voltage(),</a:t>
+            </a:r>
+          </a:p>
+          <a:p>
+            <a:pPr marL="0" indent="0">
+              <a:buNone/>
+            </a:pPr>
+            <a:r>
+              <a:rPr lang="en-GB" dirty="0" sz="1200">
+                <a:solidFill>
+                  <a:srgbClr val="9795FF"/>
+                </a:solidFill>
+                <a:latin typeface="Menlo"/>
+                <a:cs typeface="Menlo"/>
+              </a:rPr>
+              <a:t>    at( dut::Output5V));</a:t>
+            </a:r>
+          </a:p>
+          <a:p>
+            <a:pPr marL="0" indent="0">
+              <a:buNone/>
+            </a:pPr>
+            <a:endParaRPr lang="en-GB"/>
+          </a:p>
+          <a:p>
+            <a:pPr marL="0" indent="0">
+              <a:buNone/>
+            </a:pPr>
+            <a:r>
+              <a:rPr lang="en-GB" dirty="0" sz="1200">
+                <a:solidFill>
+                  <a:srgbClr val="9795FF"/>
+                </a:solidFill>
+                <a:latin typeface="Menlo"/>
+                <a:cs typeface="Menlo"/>
+              </a:rPr>
+              <a:t>Verify(</a:t>
+            </a:r>
+          </a:p>
+          <a:p>
+            <a:pPr marL="0" indent="0">
+              <a:buNone/>
+            </a:pPr>
+            <a:r>
+              <a:rPr lang="en-GB" dirty="0" sz="1200">
+                <a:solidFill>
+                  <a:srgbClr val="9795FF"/>
+                </a:solidFill>
+                <a:latin typeface="Menlo"/>
+                <a:cs typeface="Menlo"/>
+              </a:rPr>
+              <a:t>    FS_Supply_1::FS_Supply_5V0,</a:t>
+            </a:r>
+          </a:p>
+          <a:p>
+            <a:pPr marL="0" indent="0">
+              <a:buNone/>
+            </a:pPr>
+            <a:r>
+              <a:rPr lang="en-GB" dirty="0" sz="1200">
+                <a:solidFill>
+                  <a:srgbClr val="9795FF"/>
+                </a:solidFill>
+                <a:latin typeface="Menlo"/>
+                <a:cs typeface="Menlo"/>
+              </a:rPr>
+              <a:t>    rail);</a:t>
+            </a:r>
+          </a:p>
+        </p:txBody>
+      </p:sp>
+      <p:sp>
+        <p:nvSpPr>
+          <p:cNvPr id="5" name="Right 5"/>
           <p:cNvSpPr>
             <a:spLocks noGrp="1"/>
           </p:cNvSpPr>
@@ -50667,96 +52008,79 @@
           <a:bodyPr/>
           <a:lstStyle/>
           <a:p>
-            <a:pPr/>
+            <a:pPr marL="0" indent="0">
+              <a:buNone/>
+            </a:pPr>
             <a:r>
               <a:rPr lang="en-GB" dirty="0">
                 <a:solidFill>
                   <a:srgbClr val="9795FF"/>
                 </a:solidFill>
               </a:rPr>
-              <a:t>rig/  </a:t>
-            </a:r>
+              <a:t>Nowhere in it</a:t>
+            </a:r>
+          </a:p>
+          <a:p>
+            <a:pPr/>
+            <a:endParaRPr lang="en-GB"/>
+          </a:p>
+          <a:p>
+            <a:pPr/>
             <a:r>
               <a:rPr lang="en-GB" dirty="0"/>
-              <a:t>which instruments this bench has, and how they are wired</a:t>
+              <a:t>Instrument address</a:t>
             </a:r>
           </a:p>
           <a:p>
             <a:pPr/>
+            <a:r>
+              <a:rPr lang="en-GB" dirty="0"/>
+              <a:t>Relay path or channel numbers</a:t>
+            </a:r>
+          </a:p>
+          <a:p>
+            <a:pPr/>
+            <a:r>
+              <a:rPr lang="en-GB" dirty="0"/>
+              <a:t>Unit conversion</a:t>
+            </a:r>
+          </a:p>
+          <a:p>
+            <a:pPr/>
+            <a:r>
+              <a:rPr lang="en-GB" dirty="0"/>
+              <a:t>The tolerance value itself</a:t>
+            </a:r>
+          </a:p>
+          <a:p>
+            <a:pPr/>
+            <a:r>
+              <a:rPr lang="en-GB" dirty="0"/>
+              <a:t>A single logging call</a:t>
+            </a:r>
+          </a:p>
+          <a:p>
+            <a:pPr/>
+            <a:endParaRPr lang="en-GB"/>
+          </a:p>
+          <a:p>
+            <a:pPr marL="0" indent="0">
+              <a:buNone/>
+            </a:pPr>
             <a:r>
               <a:rPr lang="en-GB" dirty="0">
                 <a:solidFill>
                   <a:srgbClr val="9795FF"/>
                 </a:solidFill>
               </a:rPr>
-              <a:t>dut/  </a:t>
-            </a:r>
-            <a:r>
-              <a:rPr lang="en-GB" dirty="0"/>
-              <a:t>named test points and tolerance tables</a:t>
-            </a:r>
-          </a:p>
-          <a:p>
-            <a:pPr/>
-            <a:r>
-              <a:rPr lang="en-GB" dirty="0">
-                <a:solidFill>
-                  <a:srgbClr val="9795FF"/>
-                </a:solidFill>
-              </a:rPr>
-              <a:t>suite/  </a:t>
-            </a:r>
-            <a:r>
-              <a:rPr lang="en-GB" dirty="0"/>
-              <a:t>the test scripts and the catalog that lists them</a:t>
-            </a:r>
-          </a:p>
-          <a:p>
-            <a:pPr/>
-            <a:r>
-              <a:rPr lang="en-GB" dirty="0">
-                <a:solidFill>
-                  <a:srgbClr val="9795FF"/>
-                </a:solidFill>
-              </a:rPr>
-              <a:t>libs/  </a:t>
-            </a:r>
-            <a:r>
-              <a:rPr lang="en-GB" dirty="0"/>
-              <a:t>the portable framework — knows nothing about either</a:t>
-            </a:r>
-          </a:p>
-          <a:p>
-            <a:pPr/>
-            <a:endParaRPr lang="en-GB"/>
-          </a:p>
-          <a:p>
-            <a:pPr marL="0" indent="0">
-              <a:buNone/>
-            </a:pPr>
-            <a:r>
-              <a:rPr lang="en-GB" dirty="0">
-                <a:solidFill>
-                  <a:srgbClr val="9795FF"/>
-                </a:solidFill>
-              </a:rPr>
-              <a:t>A second bench testing a second device is its own repository.</a:t>
-            </a:r>
-          </a:p>
-          <a:p>
-            <a:pPr marL="0" indent="0">
-              <a:buNone/>
-            </a:pPr>
-            <a:r>
-              <a:rPr lang="en-GB" dirty="0"/>
-              <a:t>It reuses libs/ untouched and brings its own three.</a:t>
+              <a:t>All resolved elsewhere — most of it by the compiler.</a:t>
             </a:r>
           </a:p>
         </p:txBody>
       </p:sp>
       <p:sp>
         <p:nvSpPr>
-          <p:cNvPr id="5" name="Footer 5"/>
+          <p:cNvPr id="6" name="Footer 6"/>
           <p:cNvSpPr>
             <a:spLocks noGrp="1"/>
           </p:cNvSpPr>
@@ -50811,7 +52135,7 @@
             <a:spLocks noGrp="1"/>
           </p:cNvSpPr>
           <p:nvPr>
-            <p:ph type="body" sz="quarter" idx="15"/>
+            <p:ph type="body" sz="quarter" idx="13"/>
           </p:nvPr>
         </p:nvSpPr>
         <p:spPr/>
@@ -50824,7 +52148,7 @@
             </a:pPr>
             <a:r>
               <a:rPr lang="en-GB" dirty="0"/>
-              <a:t>The payoff</a:t>
+              <a:t>Writing a test</a:t>
             </a:r>
           </a:p>
         </p:txBody>
@@ -50849,19 +52173,200 @@
             </a:pPr>
             <a:r>
               <a:rPr lang="en-GB" dirty="0"/>
-              <a:t>Fifteen mistakes that now fail the build</a:t>
+              <a:t>Your tables stay tables</a:t>
             </a:r>
           </a:p>
         </p:txBody>
       </p:sp>
       <p:sp>
         <p:nvSpPr>
-          <p:cNvPr id="4" name="Footer 4"/>
+          <p:cNvPr id="4" name="Left 4"/>
           <p:cNvSpPr>
             <a:spLocks noGrp="1"/>
           </p:cNvSpPr>
           <p:nvPr>
-            <p:ph type="ftr" sz="quarter" idx="17"/>
+            <p:ph sz="half" idx="1"/>
+          </p:nvPr>
+        </p:nvSpPr>
+        <p:spPr/>
+        <p:txBody>
+          <a:bodyPr/>
+          <a:lstStyle/>
+          <a:p>
+            <a:pPr marL="0" indent="0">
+              <a:buNone/>
+            </a:pPr>
+            <a:r>
+              <a:rPr lang="en-GB" dirty="0" sz="1200">
+                <a:solidFill>
+                  <a:srgbClr val="9795FF"/>
+                </a:solidFill>
+                <a:latin typeface="Menlo"/>
+                <a:cs typeface="Menlo"/>
+              </a:rPr>
+              <a:t>CRIT( FS_Supply_5V0,</a:t>
+            </a:r>
+          </a:p>
+          <a:p>
+            <a:pPr marL="0" indent="0">
+              <a:buNone/>
+            </a:pPr>
+            <a:r>
+              <a:rPr lang="en-GB" dirty="0" sz="1200">
+                <a:solidFill>
+                  <a:srgbClr val="9795FF"/>
+                </a:solidFill>
+                <a:latin typeface="Menlo"/>
+                <a:cs typeface="Menlo"/>
+              </a:rPr>
+              <a:t>  EQ( 5.0_V)</a:t>
+            </a:r>
+          </a:p>
+          <a:p>
+            <a:pPr marL="0" indent="0">
+              <a:buNone/>
+            </a:pPr>
+            <a:r>
+              <a:rPr lang="en-GB" dirty="0" sz="1200">
+                <a:solidFill>
+                  <a:srgbClr val="9795FF"/>
+                </a:solidFill>
+                <a:latin typeface="Menlo"/>
+                <a:cs typeface="Menlo"/>
+              </a:rPr>
+              <a:t>    .epsilon( 0.05_V),</a:t>
+            </a:r>
+          </a:p>
+          <a:p>
+            <a:pPr marL="0" indent="0">
+              <a:buNone/>
+            </a:pPr>
+            <a:r>
+              <a:rPr lang="en-GB" dirty="0" sz="1200">
+                <a:solidFill>
+                  <a:srgbClr val="9795FF"/>
+                </a:solidFill>
+                <a:latin typeface="Menlo"/>
+                <a:cs typeface="Menlo"/>
+              </a:rPr>
+              <a:t>  "5Vdc port, 50mV")</a:t>
+            </a:r>
+          </a:p>
+          <a:p>
+            <a:pPr marL="0" indent="0">
+              <a:buNone/>
+            </a:pPr>
+            <a:endParaRPr lang="en-GB"/>
+          </a:p>
+          <a:p>
+            <a:pPr marL="0" indent="0">
+              <a:buNone/>
+            </a:pPr>
+            <a:r>
+              <a:rPr lang="en-GB" dirty="0" sz="1200">
+                <a:solidFill>
+                  <a:srgbClr val="9795FF"/>
+                </a:solidFill>
+                <a:latin typeface="Menlo"/>
+                <a:cs typeface="Menlo"/>
+              </a:rPr>
+              <a:t>POINT( Output5V,</a:t>
+            </a:r>
+          </a:p>
+          <a:p>
+            <a:pPr marL="0" indent="0">
+              <a:buNone/>
+            </a:pPr>
+            <a:r>
+              <a:rPr lang="en-GB" dirty="0" sz="1200">
+                <a:solidFill>
+                  <a:srgbClr val="9795FF"/>
+                </a:solidFill>
+                <a:latin typeface="Menlo"/>
+                <a:cs typeface="Menlo"/>
+              </a:rPr>
+              <a:t>  A, 1, 3,</a:t>
+            </a:r>
+          </a:p>
+          <a:p>
+            <a:pPr marL="0" indent="0">
+              <a:buNone/>
+            </a:pPr>
+            <a:r>
+              <a:rPr lang="en-GB" dirty="0" sz="1200">
+                <a:solidFill>
+                  <a:srgbClr val="9795FF"/>
+                </a:solidFill>
+                <a:latin typeface="Menlo"/>
+                <a:cs typeface="Menlo"/>
+              </a:rPr>
+              <a:t>  "5Vdc supply port")</a:t>
+            </a:r>
+          </a:p>
+        </p:txBody>
+      </p:sp>
+      <p:sp>
+        <p:nvSpPr>
+          <p:cNvPr id="5" name="Right 5"/>
+          <p:cNvSpPr>
+            <a:spLocks noGrp="1"/>
+          </p:cNvSpPr>
+          <p:nvPr>
+            <p:ph sz="half" idx="2"/>
+          </p:nvPr>
+        </p:nvSpPr>
+        <p:spPr/>
+        <p:txBody>
+          <a:bodyPr/>
+          <a:lstStyle/>
+          <a:p>
+            <a:pPr/>
+            <a:r>
+              <a:rPr lang="en-GB" dirty="0"/>
+              <a:t>Tolerances, test points, the catalog, the rig's wiring — flat tabular files</a:t>
+            </a:r>
+          </a:p>
+          <a:p>
+            <a:pPr/>
+            <a:r>
+              <a:rPr lang="en-GB" dirty="0"/>
+              <a:t>Meant to be read by a test engineer, close to the spec spreadsheet</a:t>
+            </a:r>
+          </a:p>
+          <a:p>
+            <a:pPr/>
+            <a:r>
+              <a:rPr lang="en-GB" dirty="0"/>
+              <a:t>The units are real: 5.0_V is a Voltage, not a double</a:t>
+            </a:r>
+          </a:p>
+          <a:p>
+            <a:pPr/>
+            <a:endParaRPr lang="en-GB"/>
+          </a:p>
+          <a:p>
+            <a:pPr marL="0" indent="0">
+              <a:buNone/>
+            </a:pPr>
+            <a:r>
+              <a:rPr lang="en-GB" dirty="0">
+                <a:solidFill>
+                  <a:srgbClr val="9795FF"/>
+                </a:solidFill>
+              </a:rPr>
+              <a:t>Data you edit. The machinery that reads it lives somewhere you never open.</a:t>
+            </a:r>
+          </a:p>
+        </p:txBody>
+      </p:sp>
+      <p:sp>
+        <p:nvSpPr>
+          <p:cNvPr id="6" name="Footer 6"/>
+          <p:cNvSpPr>
+            <a:spLocks noGrp="1"/>
+          </p:cNvSpPr>
+          <p:nvPr>
+            <p:ph type="ftr" sz="quarter" idx="15"/>
           </p:nvPr>
         </p:nvSpPr>
         <p:spPr/>
@@ -50924,7 +52429,7 @@
             </a:pPr>
             <a:r>
               <a:rPr lang="en-GB" dirty="0"/>
-              <a:t>The payoff</a:t>
+              <a:t>Writing a test</a:t>
             </a:r>
           </a:p>
         </p:txBody>
@@ -50949,7 +52454,7 @@
             </a:pPr>
             <a:r>
               <a:rPr lang="en-GB" dirty="0"/>
-              <a:t>What the compiler now refuses</a:t>
+              <a:t>What happens when you get it wrong</a:t>
             </a:r>
           </a:p>
         </p:txBody>
@@ -50969,38 +52474,62 @@
           <a:bodyPr/>
           <a:lstStyle/>
           <a:p>
+            <a:pPr marL="0" indent="0">
+              <a:buNone/>
+            </a:pPr>
+            <a:r>
+              <a:rPr lang="en-GB" dirty="0">
+                <a:solidFill>
+                  <a:srgbClr val="9795FF"/>
+                </a:solidFill>
+              </a:rPr>
+              <a:t>You write</a:t>
+            </a:r>
+          </a:p>
+          <a:p>
             <a:pPr/>
+            <a:endParaRPr lang="en-GB"/>
+          </a:p>
+          <a:p>
+            <a:pPr/>
             <a:r>
               <a:rPr lang="en-GB" dirty="0"/>
-              <a:t>A misspelled test point</a:t>
+              <a:t>dut::Output5Vx</a:t>
             </a:r>
           </a:p>
           <a:p>
             <a:pPr/>
             <a:r>
               <a:rPr lang="en-GB" dirty="0"/>
-              <a:t>A misspelled criterion</a:t>
+              <a:t>FS_Supply_5V0x</a:t>
             </a:r>
           </a:p>
           <a:p>
             <a:pPr/>
             <a:r>
               <a:rPr lang="en-GB" dirty="0"/>
-              <a:t>A criterion in the wrong unit</a:t>
+              <a:t>EQ( 5.0_A) on a voltage</a:t>
             </a:r>
           </a:p>
           <a:p>
             <a:pPr/>
             <a:r>
               <a:rPr lang="en-GB" dirty="0"/>
-              <a:t>A test point nobody wired up</a:t>
+              <a:t>A point nobody wired</a:t>
             </a:r>
           </a:p>
           <a:p>
             <a:pPr/>
             <a:r>
               <a:rPr lang="en-GB" dirty="0"/>
-              <a:t>A tolerance variant missing a limit</a:t>
+              <a:t>A limit in one variant only</a:t>
+            </a:r>
+          </a:p>
+          <a:p>
+            <a:pPr/>
+            <a:r>
+              <a:rPr lang="en-GB" dirty="0"/>
+              <a:t>Connect on a relay-less supply</a:t>
             </a:r>
           </a:p>
         </p:txBody>
@@ -51020,59 +52549,6 @@
           <a:bodyPr/>
           <a:lstStyle/>
           <a:p>
-            <a:pPr/>
-            <a:r>
-              <a:rPr lang="en-GB" dirty="0"/>
-              <a:t>A renamed script in the catalog</a:t>
-            </a:r>
-          </a:p>
-          <a:p>
-            <a:pPr/>
-            <a:r>
-              <a:rPr lang="en-GB" dirty="0"/>
-              <a:t>Connecting a supply with no relay</a:t>
-            </a:r>
-          </a:p>
-          <a:p>
-            <a:pPr/>
-            <a:r>
-              <a:rPr lang="en-GB" dirty="0"/>
-              <a:t>Channel 5 on a 4-channel scope</a:t>
-            </a:r>
-          </a:p>
-          <a:p>
-            <a:pPr/>
-            <a:r>
-              <a:rPr lang="en-GB" dirty="0"/>
-              <a:t>A driver with no safe state</a:t>
-            </a:r>
-          </a:p>
-          <a:p>
-            <a:pPr/>
-            <a:r>
-              <a:rPr lang="en-GB" dirty="0"/>
-              <a:t>A half-declared unit</a:t>
-            </a:r>
-          </a:p>
-          <a:p>
-            <a:pPr/>
-            <a:r>
-              <a:rPr lang="en-GB" dirty="0"/>
-              <a:t>Sense leads wired without force leads</a:t>
-            </a:r>
-          </a:p>
-          <a:p>
-            <a:pPr/>
-            <a:r>
-              <a:rPr lang="en-GB" dirty="0"/>
-              <a:t>…and four more</a:t>
-            </a:r>
-          </a:p>
-          <a:p>
-            <a:pPr/>
-            <a:endParaRPr lang="en-GB"/>
-          </a:p>
-          <a:p>
             <a:pPr marL="0" indent="0">
               <a:buNone/>
             </a:pPr>
@@ -51082,7 +52558,70 @@
                   <a:srgbClr val="9795FF"/>
                 </a:solidFill>
               </a:rPr>
-              <a:t>Seconds, on a laptop — not hours, on the bench.</a:t>
+              <a:t>You are told</a:t>
+            </a:r>
+          </a:p>
+          <a:p>
+            <a:pPr/>
+            <a:endParaRPr lang="en-GB"/>
+          </a:p>
+          <a:p>
+            <a:pPr/>
+            <a:r>
+              <a:rPr lang="en-GB" dirty="0"/>
+              <a:t>no such member</a:t>
+            </a:r>
+          </a:p>
+          <a:p>
+            <a:pPr/>
+            <a:r>
+              <a:rPr lang="en-GB" dirty="0"/>
+              <a:t>no such member</a:t>
+            </a:r>
+          </a:p>
+          <a:p>
+            <a:pPr/>
+            <a:r>
+              <a:rPr lang="en-GB" dirty="0"/>
+              <a:t>no viable predicate</a:t>
+            </a:r>
+          </a:p>
+          <a:p>
+            <a:pPr/>
+            <a:r>
+              <a:rPr lang="en-GB" dirty="0"/>
+              <a:t>build stops, names the point</a:t>
+            </a:r>
+          </a:p>
+          <a:p>
+            <a:pPr/>
+            <a:r>
+              <a:rPr lang="en-GB" dirty="0"/>
+              <a:t>build stops, names the variant</a:t>
+            </a:r>
+          </a:p>
+          <a:p>
+            <a:pPr/>
+            <a:r>
+              <a:rPr lang="en-GB" dirty="0"/>
+              <a:t>no matching function</a:t>
+            </a:r>
+          </a:p>
+          <a:p>
+            <a:pPr/>
+            <a:endParaRPr lang="en-GB"/>
+          </a:p>
+          <a:p>
+            <a:pPr marL="0" indent="0">
+              <a:buNone/>
+            </a:pPr>
+            <a:r>
+              <a:rPr lang="en-GB" dirty="0">
+                <a:solidFill>
+                  <a:srgbClr val="9795FF"/>
+                </a:solidFill>
+              </a:rPr>
+              <a:t>Every variant is checked, not just the one you build against.</a:t>
             </a:r>
           </a:p>
         </p:txBody>

--- a/docs/Thorium.pptx
+++ b/docs/Thorium.pptx
@@ -49549,11 +49549,11 @@
                   <a:srgbClr val="9795FF"/>
                 </a:solidFill>
               </a:rPr>
-              <a:t>libs/  </a:t>
+              <a:t>framework/  </a:t>
             </a:r>
             <a:r>
               <a:rPr lang="en-GB" dirty="0"/>
-              <a:t>the portable framework — units, criteria, the verbs, the journal</a:t>
+              <a:t>units, criteria, the verbs, the journal, the runner — portable</a:t>
             </a:r>
           </a:p>
           <a:p>
@@ -49609,7 +49609,7 @@
             </a:pPr>
             <a:r>
               <a:rPr lang="en-GB" dirty="0"/>
-              <a:t>It reuses libs/ untouched and brings its own three.</a:t>
+              <a:t>It reuses framework/ untouched and brings its own three.</a:t>
             </a:r>
           </a:p>
         </p:txBody>
